--- a/prez/architecture.pptx
+++ b/prez/architecture.pptx
@@ -5,8 +5,12 @@
     <p:sldMasterId id="2147483648" r:id="rId1"/>
   </p:sldMasterIdLst>
   <p:sldIdLst>
-    <p:sldId id="256" r:id="rId2"/>
-    <p:sldId id="257" r:id="rId3"/>
+    <p:sldId id="261" r:id="rId2"/>
+    <p:sldId id="262" r:id="rId3"/>
+    <p:sldId id="256" r:id="rId4"/>
+    <p:sldId id="258" r:id="rId5"/>
+    <p:sldId id="260" r:id="rId6"/>
+    <p:sldId id="259" r:id="rId7"/>
   </p:sldIdLst>
   <p:sldSz cx="12192000" cy="6858000"/>
   <p:notesSz cx="6858000" cy="9144000"/>
@@ -262,7 +266,7 @@
           <a:p>
             <a:fld id="{EC727D31-24EF-4195-9A9F-81F4CEA9F9FE}" type="datetimeFigureOut">
               <a:rPr lang="en-CA" smtClean="0"/>
-              <a:t>2026-08-30</a:t>
+              <a:t>2026-09-03</a:t>
             </a:fld>
             <a:endParaRPr lang="en-CA"/>
           </a:p>
@@ -462,7 +466,7 @@
           <a:p>
             <a:fld id="{EC727D31-24EF-4195-9A9F-81F4CEA9F9FE}" type="datetimeFigureOut">
               <a:rPr lang="en-CA" smtClean="0"/>
-              <a:t>2026-08-30</a:t>
+              <a:t>2026-09-03</a:t>
             </a:fld>
             <a:endParaRPr lang="en-CA"/>
           </a:p>
@@ -672,7 +676,7 @@
           <a:p>
             <a:fld id="{EC727D31-24EF-4195-9A9F-81F4CEA9F9FE}" type="datetimeFigureOut">
               <a:rPr lang="en-CA" smtClean="0"/>
-              <a:t>2026-08-30</a:t>
+              <a:t>2026-09-03</a:t>
             </a:fld>
             <a:endParaRPr lang="en-CA"/>
           </a:p>
@@ -872,7 +876,7 @@
           <a:p>
             <a:fld id="{EC727D31-24EF-4195-9A9F-81F4CEA9F9FE}" type="datetimeFigureOut">
               <a:rPr lang="en-CA" smtClean="0"/>
-              <a:t>2026-08-30</a:t>
+              <a:t>2026-09-03</a:t>
             </a:fld>
             <a:endParaRPr lang="en-CA"/>
           </a:p>
@@ -1148,7 +1152,7 @@
           <a:p>
             <a:fld id="{EC727D31-24EF-4195-9A9F-81F4CEA9F9FE}" type="datetimeFigureOut">
               <a:rPr lang="en-CA" smtClean="0"/>
-              <a:t>2026-08-30</a:t>
+              <a:t>2026-09-03</a:t>
             </a:fld>
             <a:endParaRPr lang="en-CA"/>
           </a:p>
@@ -1416,7 +1420,7 @@
           <a:p>
             <a:fld id="{EC727D31-24EF-4195-9A9F-81F4CEA9F9FE}" type="datetimeFigureOut">
               <a:rPr lang="en-CA" smtClean="0"/>
-              <a:t>2026-08-30</a:t>
+              <a:t>2026-09-03</a:t>
             </a:fld>
             <a:endParaRPr lang="en-CA"/>
           </a:p>
@@ -1831,7 +1835,7 @@
           <a:p>
             <a:fld id="{EC727D31-24EF-4195-9A9F-81F4CEA9F9FE}" type="datetimeFigureOut">
               <a:rPr lang="en-CA" smtClean="0"/>
-              <a:t>2026-08-30</a:t>
+              <a:t>2026-09-03</a:t>
             </a:fld>
             <a:endParaRPr lang="en-CA"/>
           </a:p>
@@ -1973,7 +1977,7 @@
           <a:p>
             <a:fld id="{EC727D31-24EF-4195-9A9F-81F4CEA9F9FE}" type="datetimeFigureOut">
               <a:rPr lang="en-CA" smtClean="0"/>
-              <a:t>2026-08-30</a:t>
+              <a:t>2026-09-03</a:t>
             </a:fld>
             <a:endParaRPr lang="en-CA"/>
           </a:p>
@@ -2086,7 +2090,7 @@
           <a:p>
             <a:fld id="{EC727D31-24EF-4195-9A9F-81F4CEA9F9FE}" type="datetimeFigureOut">
               <a:rPr lang="en-CA" smtClean="0"/>
-              <a:t>2026-08-30</a:t>
+              <a:t>2026-09-03</a:t>
             </a:fld>
             <a:endParaRPr lang="en-CA"/>
           </a:p>
@@ -2399,7 +2403,7 @@
           <a:p>
             <a:fld id="{EC727D31-24EF-4195-9A9F-81F4CEA9F9FE}" type="datetimeFigureOut">
               <a:rPr lang="en-CA" smtClean="0"/>
-              <a:t>2026-08-30</a:t>
+              <a:t>2026-09-03</a:t>
             </a:fld>
             <a:endParaRPr lang="en-CA"/>
           </a:p>
@@ -2688,7 +2692,7 @@
           <a:p>
             <a:fld id="{EC727D31-24EF-4195-9A9F-81F4CEA9F9FE}" type="datetimeFigureOut">
               <a:rPr lang="en-CA" smtClean="0"/>
-              <a:t>2026-08-30</a:t>
+              <a:t>2026-09-03</a:t>
             </a:fld>
             <a:endParaRPr lang="en-CA"/>
           </a:p>
@@ -2931,7 +2935,7 @@
           <a:p>
             <a:fld id="{EC727D31-24EF-4195-9A9F-81F4CEA9F9FE}" type="datetimeFigureOut">
               <a:rPr lang="en-CA" smtClean="0"/>
-              <a:t>2026-08-30</a:t>
+              <a:t>2026-09-03</a:t>
             </a:fld>
             <a:endParaRPr lang="en-CA"/>
           </a:p>
@@ -3350,1051 +3354,254 @@
       </p:grpSpPr>
       <p:sp>
         <p:nvSpPr>
-          <p:cNvPr id="5" name="Rectangle: Rounded Corners 4">
-            <a:extLst>
-              <a:ext uri="{FF2B5EF4-FFF2-40B4-BE49-F238E27FC236}">
-                <a16:creationId xmlns:a16="http://schemas.microsoft.com/office/drawing/2014/main" id="{6F9AB1E0-FAE6-11EC-BD54-C249CB85D998}"/>
-              </a:ext>
-            </a:extLst>
-          </p:cNvPr>
-          <p:cNvSpPr/>
+          <p:cNvPr id="2" name="Title 1">
+            <a:extLst>
+              <a:ext uri="{FF2B5EF4-FFF2-40B4-BE49-F238E27FC236}">
+                <a16:creationId xmlns:a16="http://schemas.microsoft.com/office/drawing/2014/main" id="{360E6E91-1153-A340-FB1E-62B9B9A4B4DA}"/>
+              </a:ext>
+            </a:extLst>
+          </p:cNvPr>
+          <p:cNvSpPr>
+            <a:spLocks noGrp="1"/>
+          </p:cNvSpPr>
+          <p:nvPr>
+            <p:ph type="title"/>
+          </p:nvPr>
+        </p:nvSpPr>
+        <p:spPr/>
+        <p:txBody>
+          <a:bodyPr/>
+          <a:lstStyle/>
+          <a:p>
+            <a:r>
+              <a:rPr lang="en-CA" dirty="0"/>
+              <a:t>API-Hydro-</a:t>
+            </a:r>
+            <a:r>
+              <a:rPr lang="en-CA" dirty="0" err="1"/>
+              <a:t>quebec</a:t>
+            </a:r>
+            <a:endParaRPr lang="en-CA" dirty="0"/>
+          </a:p>
+        </p:txBody>
+      </p:sp>
+      <p:sp>
+        <p:nvSpPr>
+          <p:cNvPr id="3" name="Content Placeholder 2">
+            <a:extLst>
+              <a:ext uri="{FF2B5EF4-FFF2-40B4-BE49-F238E27FC236}">
+                <a16:creationId xmlns:a16="http://schemas.microsoft.com/office/drawing/2014/main" id="{AF762F95-7306-62AA-2BF2-3E50FC476184}"/>
+              </a:ext>
+            </a:extLst>
+          </p:cNvPr>
+          <p:cNvSpPr>
+            <a:spLocks noGrp="1"/>
+          </p:cNvSpPr>
+          <p:nvPr>
+            <p:ph idx="1"/>
+          </p:nvPr>
+        </p:nvSpPr>
+        <p:spPr/>
+        <p:txBody>
+          <a:bodyPr/>
+          <a:lstStyle/>
+          <a:p>
+            <a:pPr lvl="0"/>
+            <a:r>
+              <a:rPr lang="en-CA" dirty="0" err="1"/>
+              <a:t>l’emplacement</a:t>
+            </a:r>
+            <a:r>
+              <a:rPr lang="en-CA" dirty="0"/>
+              <a:t> </a:t>
+            </a:r>
+            <a:r>
+              <a:rPr lang="en-CA" dirty="0" err="1"/>
+              <a:t>géographique</a:t>
+            </a:r>
+            <a:r>
+              <a:rPr lang="en-CA" dirty="0"/>
+              <a:t> </a:t>
+            </a:r>
+          </a:p>
+          <a:p>
+            <a:pPr lvl="0"/>
+            <a:r>
+              <a:rPr lang="en-CA" dirty="0"/>
+              <a:t>le </a:t>
+            </a:r>
+            <a:r>
+              <a:rPr lang="en-CA" dirty="0" err="1"/>
+              <a:t>nombre</a:t>
+            </a:r>
+            <a:r>
+              <a:rPr lang="en-CA" dirty="0"/>
+              <a:t> de clients </a:t>
+            </a:r>
+            <a:r>
+              <a:rPr lang="en-CA" dirty="0" err="1"/>
+              <a:t>privés</a:t>
+            </a:r>
+            <a:r>
+              <a:rPr lang="en-CA" dirty="0"/>
+              <a:t> </a:t>
+            </a:r>
+            <a:r>
+              <a:rPr lang="en-CA" dirty="0" err="1"/>
+              <a:t>d’électricité</a:t>
+            </a:r>
+            <a:r>
+              <a:rPr lang="en-CA" dirty="0"/>
+              <a:t> </a:t>
+            </a:r>
+          </a:p>
+          <a:p>
+            <a:pPr lvl="0"/>
+            <a:r>
+              <a:rPr lang="en-CA" dirty="0" err="1"/>
+              <a:t>l’heure</a:t>
+            </a:r>
+            <a:r>
+              <a:rPr lang="en-CA" dirty="0"/>
+              <a:t> de début de la panne </a:t>
+            </a:r>
+          </a:p>
+          <a:p>
+            <a:pPr lvl="0"/>
+            <a:r>
+              <a:rPr lang="en-CA" dirty="0"/>
+              <a:t>la cause de la panne, </a:t>
+            </a:r>
+            <a:r>
+              <a:rPr lang="en-CA" dirty="0" err="1"/>
+              <a:t>si</a:t>
+            </a:r>
+            <a:r>
+              <a:rPr lang="en-CA" dirty="0"/>
+              <a:t> </a:t>
+            </a:r>
+            <a:r>
+              <a:rPr lang="en-CA" dirty="0" err="1"/>
+              <a:t>connue</a:t>
+            </a:r>
+            <a:r>
+              <a:rPr lang="en-CA" dirty="0"/>
+              <a:t> </a:t>
+            </a:r>
+          </a:p>
+          <a:p>
+            <a:pPr lvl="0"/>
+            <a:r>
+              <a:rPr lang="en-CA" dirty="0" err="1"/>
+              <a:t>l’heure</a:t>
+            </a:r>
+            <a:r>
+              <a:rPr lang="en-CA" dirty="0"/>
+              <a:t> de </a:t>
+            </a:r>
+            <a:r>
+              <a:rPr lang="en-CA" dirty="0" err="1"/>
+              <a:t>rétablissement</a:t>
+            </a:r>
+            <a:r>
+              <a:rPr lang="en-CA" dirty="0"/>
+              <a:t> </a:t>
+            </a:r>
+            <a:r>
+              <a:rPr lang="en-CA" dirty="0" err="1"/>
+              <a:t>prévu</a:t>
+            </a:r>
+            <a:r>
+              <a:rPr lang="en-CA" dirty="0"/>
+              <a:t> du service</a:t>
+            </a:r>
+          </a:p>
+          <a:p>
+            <a:pPr marL="0" indent="0">
+              <a:buNone/>
+            </a:pPr>
+            <a:endParaRPr lang="en-CA" dirty="0"/>
+          </a:p>
+        </p:txBody>
+      </p:sp>
+      <p:pic>
+        <p:nvPicPr>
+          <p:cNvPr id="6" name="Content Placeholder 3" descr="Logo Hydro-Québec">
+            <a:extLst>
+              <a:ext uri="{FF2B5EF4-FFF2-40B4-BE49-F238E27FC236}">
+                <a16:creationId xmlns:a16="http://schemas.microsoft.com/office/drawing/2014/main" id="{F5EB6185-7B80-2840-D698-9984B070FB31}"/>
+              </a:ext>
+            </a:extLst>
+          </p:cNvPr>
+          <p:cNvPicPr>
+            <a:picLocks noChangeAspect="1"/>
+          </p:cNvPicPr>
           <p:nvPr/>
-        </p:nvSpPr>
-        <p:spPr>
-          <a:xfrm>
-            <a:off x="578534" y="232837"/>
-            <a:ext cx="9409166" cy="5731933"/>
-          </a:xfrm>
-          <a:prstGeom prst="roundRect">
-            <a:avLst/>
-          </a:prstGeom>
-        </p:spPr>
-        <p:style>
-          <a:lnRef idx="2">
-            <a:schemeClr val="accent1">
-              <a:shade val="15000"/>
-            </a:schemeClr>
-          </a:lnRef>
-          <a:fillRef idx="1">
-            <a:schemeClr val="accent1"/>
-          </a:fillRef>
-          <a:effectRef idx="0">
-            <a:schemeClr val="accent1"/>
-          </a:effectRef>
-          <a:fontRef idx="minor">
-            <a:schemeClr val="lt1"/>
-          </a:fontRef>
-        </p:style>
-        <p:txBody>
-          <a:bodyPr rtlCol="0" anchor="ctr"/>
-          <a:lstStyle/>
-          <a:p>
-            <a:pPr algn="ctr"/>
-            <a:endParaRPr lang="en-CA"/>
-          </a:p>
-        </p:txBody>
-      </p:sp>
-      <p:sp>
-        <p:nvSpPr>
-          <p:cNvPr id="7" name="Flowchart: Magnetic Disk 6">
-            <a:extLst>
-              <a:ext uri="{FF2B5EF4-FFF2-40B4-BE49-F238E27FC236}">
-                <a16:creationId xmlns:a16="http://schemas.microsoft.com/office/drawing/2014/main" id="{5AE86618-411A-11BE-8832-FC4C16B50E0F}"/>
-              </a:ext>
-            </a:extLst>
-          </p:cNvPr>
-          <p:cNvSpPr/>
-          <p:nvPr/>
-        </p:nvSpPr>
-        <p:spPr>
-          <a:xfrm>
-            <a:off x="7984066" y="2597434"/>
-            <a:ext cx="1540933" cy="1608666"/>
-          </a:xfrm>
-          <a:prstGeom prst="flowChartMagneticDisk">
-            <a:avLst/>
-          </a:prstGeom>
-        </p:spPr>
-        <p:style>
-          <a:lnRef idx="3">
-            <a:schemeClr val="lt1"/>
-          </a:lnRef>
-          <a:fillRef idx="1">
-            <a:schemeClr val="accent2"/>
-          </a:fillRef>
-          <a:effectRef idx="1">
-            <a:schemeClr val="accent2"/>
-          </a:effectRef>
-          <a:fontRef idx="minor">
-            <a:schemeClr val="lt1"/>
-          </a:fontRef>
-        </p:style>
-        <p:txBody>
-          <a:bodyPr rtlCol="0" anchor="ctr"/>
-          <a:lstStyle/>
-          <a:p>
-            <a:pPr algn="ctr"/>
-            <a:r>
-              <a:rPr lang="en-CA" dirty="0"/>
-              <a:t>Database</a:t>
-            </a:r>
-          </a:p>
-        </p:txBody>
-      </p:sp>
-      <p:sp>
-        <p:nvSpPr>
-          <p:cNvPr id="9" name="Lightning Bolt 8">
-            <a:extLst>
-              <a:ext uri="{FF2B5EF4-FFF2-40B4-BE49-F238E27FC236}">
-                <a16:creationId xmlns:a16="http://schemas.microsoft.com/office/drawing/2014/main" id="{3C2B9955-FDE3-2123-208A-7E46A6400683}"/>
-              </a:ext>
-            </a:extLst>
-          </p:cNvPr>
-          <p:cNvSpPr/>
-          <p:nvPr/>
-        </p:nvSpPr>
-        <p:spPr>
-          <a:xfrm rot="899964">
-            <a:off x="10414000" y="1634067"/>
-            <a:ext cx="905933" cy="2387600"/>
-          </a:xfrm>
-          <a:prstGeom prst="lightningBolt">
-            <a:avLst/>
-          </a:prstGeom>
-        </p:spPr>
-        <p:style>
-          <a:lnRef idx="2">
-            <a:schemeClr val="accent1"/>
-          </a:lnRef>
-          <a:fillRef idx="1">
-            <a:schemeClr val="lt1"/>
-          </a:fillRef>
-          <a:effectRef idx="0">
-            <a:schemeClr val="accent1"/>
-          </a:effectRef>
-          <a:fontRef idx="minor">
-            <a:schemeClr val="dk1"/>
-          </a:fontRef>
-        </p:style>
-        <p:txBody>
-          <a:bodyPr rtlCol="0" anchor="ctr"/>
-          <a:lstStyle/>
-          <a:p>
-            <a:pPr algn="ctr"/>
-            <a:endParaRPr lang="en-CA" dirty="0"/>
-          </a:p>
-        </p:txBody>
-      </p:sp>
-      <p:sp>
-        <p:nvSpPr>
-          <p:cNvPr id="10" name="TextBox 9">
-            <a:extLst>
-              <a:ext uri="{FF2B5EF4-FFF2-40B4-BE49-F238E27FC236}">
-                <a16:creationId xmlns:a16="http://schemas.microsoft.com/office/drawing/2014/main" id="{F8D112E4-147E-AF1D-D1F2-2B0BB576E2EF}"/>
-              </a:ext>
-            </a:extLst>
-          </p:cNvPr>
-          <p:cNvSpPr txBox="1"/>
-          <p:nvPr/>
-        </p:nvSpPr>
-        <p:spPr>
-          <a:xfrm>
-            <a:off x="10120467" y="4402667"/>
-            <a:ext cx="1612364" cy="369332"/>
+        </p:nvPicPr>
+        <p:blipFill>
+          <a:blip r:embed="rId2"/>
+          <a:stretch>
+            <a:fillRect/>
+          </a:stretch>
+        </p:blipFill>
+        <p:spPr>
+          <a:xfrm>
+            <a:off x="9920747" y="170330"/>
+            <a:ext cx="1651819" cy="1355009"/>
           </a:xfrm>
           <a:prstGeom prst="rect">
             <a:avLst/>
           </a:prstGeom>
-          <a:noFill/>
-        </p:spPr>
-        <p:txBody>
-          <a:bodyPr wrap="none" rtlCol="0">
-            <a:spAutoFit/>
-          </a:bodyPr>
-          <a:lstStyle/>
-          <a:p>
-            <a:r>
-              <a:rPr lang="en-CA" dirty="0"/>
-              <a:t>Hydro-</a:t>
-            </a:r>
-            <a:r>
-              <a:rPr lang="en-CA" dirty="0" err="1"/>
-              <a:t>quebec</a:t>
-            </a:r>
-            <a:endParaRPr lang="en-CA" dirty="0"/>
-          </a:p>
-        </p:txBody>
-      </p:sp>
-      <p:sp>
-        <p:nvSpPr>
-          <p:cNvPr id="11" name="Rectangle: Rounded Corners 10">
-            <a:extLst>
-              <a:ext uri="{FF2B5EF4-FFF2-40B4-BE49-F238E27FC236}">
-                <a16:creationId xmlns:a16="http://schemas.microsoft.com/office/drawing/2014/main" id="{A9151A12-9A76-4E9E-047F-01B5CC697288}"/>
-              </a:ext>
-            </a:extLst>
-          </p:cNvPr>
-          <p:cNvSpPr/>
+        </p:spPr>
+      </p:pic>
+      <p:pic>
+        <p:nvPicPr>
+          <p:cNvPr id="9" name="Picture 8">
+            <a:extLst>
+              <a:ext uri="{FF2B5EF4-FFF2-40B4-BE49-F238E27FC236}">
+                <a16:creationId xmlns:a16="http://schemas.microsoft.com/office/drawing/2014/main" id="{B8B187C3-77A2-022F-319A-1C53E9046CAF}"/>
+              </a:ext>
+            </a:extLst>
+          </p:cNvPr>
+          <p:cNvPicPr>
+            <a:picLocks noChangeAspect="1"/>
+          </p:cNvPicPr>
           <p:nvPr/>
-        </p:nvSpPr>
-        <p:spPr>
-          <a:xfrm>
-            <a:off x="6342149" y="918791"/>
-            <a:ext cx="2207889" cy="770109"/>
-          </a:xfrm>
-          <a:prstGeom prst="roundRect">
-            <a:avLst/>
-          </a:prstGeom>
-          <a:ln w="57150"/>
-        </p:spPr>
-        <p:style>
-          <a:lnRef idx="2">
-            <a:schemeClr val="accent6"/>
-          </a:lnRef>
-          <a:fillRef idx="1">
-            <a:schemeClr val="lt1"/>
-          </a:fillRef>
-          <a:effectRef idx="0">
-            <a:schemeClr val="accent6"/>
-          </a:effectRef>
-          <a:fontRef idx="minor">
-            <a:schemeClr val="dk1"/>
-          </a:fontRef>
-        </p:style>
-        <p:txBody>
-          <a:bodyPr rtlCol="0" anchor="ctr"/>
-          <a:lstStyle/>
-          <a:p>
-            <a:pPr algn="ctr"/>
-            <a:r>
-              <a:rPr lang="en-CA" dirty="0"/>
-              <a:t>Service de </a:t>
-            </a:r>
-            <a:r>
-              <a:rPr lang="en-CA" dirty="0" err="1"/>
-              <a:t>recup</a:t>
-            </a:r>
-            <a:r>
-              <a:rPr lang="en-CA" dirty="0"/>
-              <a:t> de </a:t>
-            </a:r>
-            <a:r>
-              <a:rPr lang="en-CA" dirty="0" err="1"/>
-              <a:t>donnee</a:t>
-            </a:r>
-            <a:r>
-              <a:rPr lang="en-CA" dirty="0"/>
-              <a:t> (each 5mn)</a:t>
-            </a:r>
-          </a:p>
-        </p:txBody>
-      </p:sp>
-      <p:cxnSp>
-        <p:nvCxnSpPr>
-          <p:cNvPr id="14" name="Connector: Elbow 13">
-            <a:extLst>
-              <a:ext uri="{FF2B5EF4-FFF2-40B4-BE49-F238E27FC236}">
-                <a16:creationId xmlns:a16="http://schemas.microsoft.com/office/drawing/2014/main" id="{022CE446-8D56-5A89-E7A6-921700C6985E}"/>
-              </a:ext>
-            </a:extLst>
-          </p:cNvPr>
-          <p:cNvCxnSpPr>
-            <a:cxnSpLocks/>
-            <a:stCxn id="11" idx="3"/>
-            <a:endCxn id="9" idx="2"/>
-          </p:cNvCxnSpPr>
-          <p:nvPr/>
-        </p:nvCxnSpPr>
-        <p:spPr>
-          <a:xfrm>
-            <a:off x="8550038" y="1303846"/>
-            <a:ext cx="2114174" cy="1344388"/>
-          </a:xfrm>
-          <a:prstGeom prst="bentConnector3">
-            <a:avLst>
-              <a:gd name="adj1" fmla="val 50000"/>
-            </a:avLst>
-          </a:prstGeom>
-          <a:ln>
-            <a:tailEnd type="triangle"/>
-          </a:ln>
-        </p:spPr>
-        <p:style>
-          <a:lnRef idx="3">
-            <a:schemeClr val="accent2"/>
-          </a:lnRef>
-          <a:fillRef idx="0">
-            <a:schemeClr val="accent2"/>
-          </a:fillRef>
-          <a:effectRef idx="2">
-            <a:schemeClr val="accent2"/>
-          </a:effectRef>
-          <a:fontRef idx="minor">
-            <a:schemeClr val="tx1"/>
-          </a:fontRef>
-        </p:style>
-      </p:cxnSp>
-      <p:cxnSp>
-        <p:nvCxnSpPr>
-          <p:cNvPr id="16" name="Connector: Elbow 15">
-            <a:extLst>
-              <a:ext uri="{FF2B5EF4-FFF2-40B4-BE49-F238E27FC236}">
-                <a16:creationId xmlns:a16="http://schemas.microsoft.com/office/drawing/2014/main" id="{881D22CF-7D1D-D41C-9A95-A844BB7F5123}"/>
-              </a:ext>
-            </a:extLst>
-          </p:cNvPr>
-          <p:cNvCxnSpPr>
-            <a:cxnSpLocks/>
-            <a:stCxn id="11" idx="2"/>
-            <a:endCxn id="7" idx="2"/>
-          </p:cNvCxnSpPr>
-          <p:nvPr/>
-        </p:nvCxnSpPr>
-        <p:spPr>
-          <a:xfrm rot="16200000" flipH="1">
-            <a:off x="6858647" y="2276347"/>
-            <a:ext cx="1712867" cy="537972"/>
-          </a:xfrm>
-          <a:prstGeom prst="bentConnector2">
-            <a:avLst/>
-          </a:prstGeom>
-          <a:ln>
-            <a:tailEnd type="triangle"/>
-          </a:ln>
-        </p:spPr>
-        <p:style>
-          <a:lnRef idx="3">
-            <a:schemeClr val="accent2"/>
-          </a:lnRef>
-          <a:fillRef idx="0">
-            <a:schemeClr val="accent2"/>
-          </a:fillRef>
-          <a:effectRef idx="2">
-            <a:schemeClr val="accent2"/>
-          </a:effectRef>
-          <a:fontRef idx="minor">
-            <a:schemeClr val="tx1"/>
-          </a:fontRef>
-        </p:style>
-      </p:cxnSp>
-      <p:sp>
-        <p:nvSpPr>
-          <p:cNvPr id="18" name="TextBox 17">
-            <a:extLst>
-              <a:ext uri="{FF2B5EF4-FFF2-40B4-BE49-F238E27FC236}">
-                <a16:creationId xmlns:a16="http://schemas.microsoft.com/office/drawing/2014/main" id="{01570418-1F05-30E0-052E-54C849B4370B}"/>
-              </a:ext>
-            </a:extLst>
-          </p:cNvPr>
-          <p:cNvSpPr txBox="1"/>
-          <p:nvPr/>
-        </p:nvSpPr>
-        <p:spPr>
-          <a:xfrm>
-            <a:off x="9297810" y="1504233"/>
-            <a:ext cx="308098" cy="369332"/>
+        </p:nvPicPr>
+        <p:blipFill>
+          <a:blip r:embed="rId3"/>
+          <a:stretch>
+            <a:fillRect/>
+          </a:stretch>
+        </p:blipFill>
+        <p:spPr>
+          <a:xfrm>
+            <a:off x="982537" y="4713796"/>
+            <a:ext cx="10226926" cy="1463167"/>
           </a:xfrm>
           <a:prstGeom prst="rect">
             <a:avLst/>
           </a:prstGeom>
-          <a:noFill/>
-        </p:spPr>
-        <p:txBody>
-          <a:bodyPr wrap="none" rtlCol="0">
-            <a:spAutoFit/>
-          </a:bodyPr>
-          <a:lstStyle/>
-          <a:p>
-            <a:r>
-              <a:rPr lang="en-CA" dirty="0"/>
-              <a:t>1</a:t>
-            </a:r>
-          </a:p>
-        </p:txBody>
-      </p:sp>
-      <p:sp>
-        <p:nvSpPr>
-          <p:cNvPr id="20" name="TextBox 19">
-            <a:extLst>
-              <a:ext uri="{FF2B5EF4-FFF2-40B4-BE49-F238E27FC236}">
-                <a16:creationId xmlns:a16="http://schemas.microsoft.com/office/drawing/2014/main" id="{A528A61C-01EB-C7EE-36BB-34F96F55F4C7}"/>
-              </a:ext>
-            </a:extLst>
-          </p:cNvPr>
-          <p:cNvSpPr txBox="1"/>
-          <p:nvPr/>
-        </p:nvSpPr>
-        <p:spPr>
-          <a:xfrm>
-            <a:off x="7475260" y="1958501"/>
-            <a:ext cx="308098" cy="369332"/>
-          </a:xfrm>
-          <a:prstGeom prst="rect">
-            <a:avLst/>
-          </a:prstGeom>
-          <a:noFill/>
-        </p:spPr>
-        <p:txBody>
-          <a:bodyPr wrap="none" rtlCol="0">
-            <a:spAutoFit/>
-          </a:bodyPr>
-          <a:lstStyle/>
-          <a:p>
-            <a:r>
-              <a:rPr lang="en-CA" dirty="0"/>
-              <a:t>2</a:t>
-            </a:r>
-          </a:p>
-        </p:txBody>
-      </p:sp>
-      <p:sp>
-        <p:nvSpPr>
-          <p:cNvPr id="22" name="Rectangle: Rounded Corners 21">
-            <a:extLst>
-              <a:ext uri="{FF2B5EF4-FFF2-40B4-BE49-F238E27FC236}">
-                <a16:creationId xmlns:a16="http://schemas.microsoft.com/office/drawing/2014/main" id="{FD981EDA-817A-C571-0F29-2183554374F3}"/>
-              </a:ext>
-            </a:extLst>
-          </p:cNvPr>
-          <p:cNvSpPr/>
-          <p:nvPr/>
-        </p:nvSpPr>
-        <p:spPr>
-          <a:xfrm>
-            <a:off x="1069402" y="2758186"/>
-            <a:ext cx="2472267" cy="770109"/>
-          </a:xfrm>
-          <a:prstGeom prst="roundRect">
-            <a:avLst/>
-          </a:prstGeom>
-          <a:ln w="57150"/>
-        </p:spPr>
-        <p:style>
-          <a:lnRef idx="2">
-            <a:schemeClr val="accent6"/>
-          </a:lnRef>
-          <a:fillRef idx="1">
-            <a:schemeClr val="lt1"/>
-          </a:fillRef>
-          <a:effectRef idx="0">
-            <a:schemeClr val="accent6"/>
-          </a:effectRef>
-          <a:fontRef idx="minor">
-            <a:schemeClr val="dk1"/>
-          </a:fontRef>
-        </p:style>
-        <p:txBody>
-          <a:bodyPr rtlCol="0" anchor="ctr"/>
-          <a:lstStyle/>
-          <a:p>
-            <a:pPr algn="ctr"/>
-            <a:r>
-              <a:rPr lang="en-CA" dirty="0"/>
-              <a:t>Training des </a:t>
-            </a:r>
-            <a:r>
-              <a:rPr lang="en-CA" dirty="0" err="1"/>
-              <a:t>modeles</a:t>
-            </a:r>
-            <a:br>
-              <a:rPr lang="en-CA" dirty="0"/>
-            </a:br>
-            <a:r>
-              <a:rPr lang="en-CA" dirty="0"/>
-              <a:t>H2O </a:t>
-            </a:r>
-            <a:r>
-              <a:rPr lang="en-CA" dirty="0" err="1"/>
-              <a:t>Automl</a:t>
-            </a:r>
-            <a:endParaRPr lang="en-CA" dirty="0"/>
-          </a:p>
-        </p:txBody>
-      </p:sp>
-      <p:cxnSp>
-        <p:nvCxnSpPr>
-          <p:cNvPr id="23" name="Connector: Elbow 22">
-            <a:extLst>
-              <a:ext uri="{FF2B5EF4-FFF2-40B4-BE49-F238E27FC236}">
-                <a16:creationId xmlns:a16="http://schemas.microsoft.com/office/drawing/2014/main" id="{6FFC77A5-C56C-F93A-CA22-75123E22B986}"/>
-              </a:ext>
-            </a:extLst>
-          </p:cNvPr>
-          <p:cNvCxnSpPr>
-            <a:cxnSpLocks/>
-            <a:stCxn id="22" idx="3"/>
-            <a:endCxn id="7" idx="2"/>
-          </p:cNvCxnSpPr>
-          <p:nvPr/>
-        </p:nvCxnSpPr>
-        <p:spPr>
-          <a:xfrm>
-            <a:off x="3541669" y="3143241"/>
-            <a:ext cx="4442397" cy="258526"/>
-          </a:xfrm>
-          <a:prstGeom prst="bentConnector3">
-            <a:avLst>
-              <a:gd name="adj1" fmla="val 35612"/>
-            </a:avLst>
-          </a:prstGeom>
-          <a:ln>
-            <a:tailEnd type="triangle"/>
-          </a:ln>
-        </p:spPr>
-        <p:style>
-          <a:lnRef idx="3">
-            <a:schemeClr val="accent2"/>
-          </a:lnRef>
-          <a:fillRef idx="0">
-            <a:schemeClr val="accent2"/>
-          </a:fillRef>
-          <a:effectRef idx="2">
-            <a:schemeClr val="accent2"/>
-          </a:effectRef>
-          <a:fontRef idx="minor">
-            <a:schemeClr val="tx1"/>
-          </a:fontRef>
-        </p:style>
-      </p:cxnSp>
-      <p:sp>
-        <p:nvSpPr>
-          <p:cNvPr id="28" name="TextBox 27">
-            <a:extLst>
-              <a:ext uri="{FF2B5EF4-FFF2-40B4-BE49-F238E27FC236}">
-                <a16:creationId xmlns:a16="http://schemas.microsoft.com/office/drawing/2014/main" id="{7151653F-47A6-2D7E-019B-12E88560C473}"/>
-              </a:ext>
-            </a:extLst>
-          </p:cNvPr>
-          <p:cNvSpPr txBox="1"/>
-          <p:nvPr/>
-        </p:nvSpPr>
-        <p:spPr>
-          <a:xfrm>
-            <a:off x="6082126" y="2334778"/>
-            <a:ext cx="308098" cy="369332"/>
-          </a:xfrm>
-          <a:prstGeom prst="rect">
-            <a:avLst/>
-          </a:prstGeom>
-          <a:noFill/>
-        </p:spPr>
-        <p:txBody>
-          <a:bodyPr wrap="none" rtlCol="0">
-            <a:spAutoFit/>
-          </a:bodyPr>
-          <a:lstStyle/>
-          <a:p>
-            <a:r>
-              <a:rPr lang="en-CA" dirty="0"/>
-              <a:t>3</a:t>
-            </a:r>
-          </a:p>
-        </p:txBody>
-      </p:sp>
-      <p:sp>
-        <p:nvSpPr>
-          <p:cNvPr id="32" name="Rectangle: Rounded Corners 31">
-            <a:extLst>
-              <a:ext uri="{FF2B5EF4-FFF2-40B4-BE49-F238E27FC236}">
-                <a16:creationId xmlns:a16="http://schemas.microsoft.com/office/drawing/2014/main" id="{259C48C3-833B-C980-56B2-9BA78642C0B9}"/>
-              </a:ext>
-            </a:extLst>
-          </p:cNvPr>
-          <p:cNvSpPr/>
-          <p:nvPr/>
-        </p:nvSpPr>
-        <p:spPr>
-          <a:xfrm>
-            <a:off x="1621375" y="636918"/>
-            <a:ext cx="2472267" cy="770109"/>
-          </a:xfrm>
-          <a:prstGeom prst="roundRect">
-            <a:avLst/>
-          </a:prstGeom>
-          <a:ln w="57150"/>
-        </p:spPr>
-        <p:style>
-          <a:lnRef idx="2">
-            <a:schemeClr val="accent6"/>
-          </a:lnRef>
-          <a:fillRef idx="1">
-            <a:schemeClr val="lt1"/>
-          </a:fillRef>
-          <a:effectRef idx="0">
-            <a:schemeClr val="accent6"/>
-          </a:effectRef>
-          <a:fontRef idx="minor">
-            <a:schemeClr val="dk1"/>
-          </a:fontRef>
-        </p:style>
-        <p:txBody>
-          <a:bodyPr rtlCol="0" anchor="ctr"/>
-          <a:lstStyle/>
-          <a:p>
-            <a:pPr algn="ctr"/>
-            <a:r>
-              <a:rPr lang="en-CA" dirty="0"/>
-              <a:t>Server </a:t>
-            </a:r>
-          </a:p>
-          <a:p>
-            <a:pPr algn="ctr"/>
-            <a:r>
-              <a:rPr lang="en-CA" dirty="0"/>
-              <a:t>ML flow </a:t>
-            </a:r>
-          </a:p>
-        </p:txBody>
-      </p:sp>
-      <p:cxnSp>
-        <p:nvCxnSpPr>
-          <p:cNvPr id="33" name="Connector: Elbow 32">
-            <a:extLst>
-              <a:ext uri="{FF2B5EF4-FFF2-40B4-BE49-F238E27FC236}">
-                <a16:creationId xmlns:a16="http://schemas.microsoft.com/office/drawing/2014/main" id="{E10C175C-B3F4-FF26-2C04-BEC1BADC4803}"/>
-              </a:ext>
-            </a:extLst>
-          </p:cNvPr>
-          <p:cNvCxnSpPr>
-            <a:cxnSpLocks/>
-            <a:stCxn id="32" idx="3"/>
-            <a:endCxn id="7" idx="2"/>
-          </p:cNvCxnSpPr>
-          <p:nvPr/>
-        </p:nvCxnSpPr>
-        <p:spPr>
-          <a:xfrm>
-            <a:off x="4093642" y="1021973"/>
-            <a:ext cx="3890424" cy="2379794"/>
-          </a:xfrm>
-          <a:prstGeom prst="bentConnector3">
-            <a:avLst>
-              <a:gd name="adj1" fmla="val 50000"/>
-            </a:avLst>
-          </a:prstGeom>
-          <a:ln>
-            <a:tailEnd type="triangle"/>
-          </a:ln>
-        </p:spPr>
-        <p:style>
-          <a:lnRef idx="3">
-            <a:schemeClr val="accent2"/>
-          </a:lnRef>
-          <a:fillRef idx="0">
-            <a:schemeClr val="accent2"/>
-          </a:fillRef>
-          <a:effectRef idx="2">
-            <a:schemeClr val="accent2"/>
-          </a:effectRef>
-          <a:fontRef idx="minor">
-            <a:schemeClr val="tx1"/>
-          </a:fontRef>
-        </p:style>
-      </p:cxnSp>
-      <p:sp>
-        <p:nvSpPr>
-          <p:cNvPr id="37" name="TextBox 36">
-            <a:extLst>
-              <a:ext uri="{FF2B5EF4-FFF2-40B4-BE49-F238E27FC236}">
-                <a16:creationId xmlns:a16="http://schemas.microsoft.com/office/drawing/2014/main" id="{A4C306D8-9E90-D802-0B2E-2E9BCEFBEF04}"/>
-              </a:ext>
-            </a:extLst>
-          </p:cNvPr>
-          <p:cNvSpPr txBox="1"/>
-          <p:nvPr/>
-        </p:nvSpPr>
-        <p:spPr>
-          <a:xfrm>
-            <a:off x="5417301" y="2545333"/>
-            <a:ext cx="308098" cy="369332"/>
-          </a:xfrm>
-          <a:prstGeom prst="rect">
-            <a:avLst/>
-          </a:prstGeom>
-          <a:noFill/>
-        </p:spPr>
-        <p:txBody>
-          <a:bodyPr wrap="none" rtlCol="0">
-            <a:spAutoFit/>
-          </a:bodyPr>
-          <a:lstStyle/>
-          <a:p>
-            <a:r>
-              <a:rPr lang="en-CA" dirty="0"/>
-              <a:t>4</a:t>
-            </a:r>
-          </a:p>
-        </p:txBody>
-      </p:sp>
-      <p:sp>
-        <p:nvSpPr>
-          <p:cNvPr id="38" name="Rectangle: Rounded Corners 37">
-            <a:extLst>
-              <a:ext uri="{FF2B5EF4-FFF2-40B4-BE49-F238E27FC236}">
-                <a16:creationId xmlns:a16="http://schemas.microsoft.com/office/drawing/2014/main" id="{90B7A6E2-C2B8-088C-E885-F18C080B97D1}"/>
-              </a:ext>
-            </a:extLst>
-          </p:cNvPr>
-          <p:cNvSpPr/>
-          <p:nvPr/>
-        </p:nvSpPr>
-        <p:spPr>
-          <a:xfrm>
-            <a:off x="853728" y="4917531"/>
-            <a:ext cx="2472267" cy="770109"/>
-          </a:xfrm>
-          <a:prstGeom prst="roundRect">
-            <a:avLst/>
-          </a:prstGeom>
-          <a:ln w="57150"/>
-        </p:spPr>
-        <p:style>
-          <a:lnRef idx="2">
-            <a:schemeClr val="accent6"/>
-          </a:lnRef>
-          <a:fillRef idx="1">
-            <a:schemeClr val="lt1"/>
-          </a:fillRef>
-          <a:effectRef idx="0">
-            <a:schemeClr val="accent6"/>
-          </a:effectRef>
-          <a:fontRef idx="minor">
-            <a:schemeClr val="dk1"/>
-          </a:fontRef>
-        </p:style>
-        <p:txBody>
-          <a:bodyPr rtlCol="0" anchor="ctr"/>
-          <a:lstStyle/>
-          <a:p>
-            <a:pPr algn="ctr"/>
-            <a:r>
-              <a:rPr lang="en-CA" dirty="0" err="1"/>
-              <a:t>streamlit</a:t>
-            </a:r>
-            <a:endParaRPr lang="en-CA" dirty="0"/>
-          </a:p>
-        </p:txBody>
-      </p:sp>
-      <p:cxnSp>
-        <p:nvCxnSpPr>
-          <p:cNvPr id="39" name="Connector: Elbow 38">
-            <a:extLst>
-              <a:ext uri="{FF2B5EF4-FFF2-40B4-BE49-F238E27FC236}">
-                <a16:creationId xmlns:a16="http://schemas.microsoft.com/office/drawing/2014/main" id="{E573A92F-EDCA-5808-5CC9-A1875D973237}"/>
-              </a:ext>
-            </a:extLst>
-          </p:cNvPr>
-          <p:cNvCxnSpPr>
-            <a:cxnSpLocks/>
-            <a:stCxn id="4" idx="3"/>
-            <a:endCxn id="7" idx="2"/>
-          </p:cNvCxnSpPr>
-          <p:nvPr/>
-        </p:nvCxnSpPr>
-        <p:spPr>
-          <a:xfrm flipV="1">
-            <a:off x="6289272" y="3401767"/>
-            <a:ext cx="1694794" cy="916444"/>
-          </a:xfrm>
-          <a:prstGeom prst="bentConnector3">
-            <a:avLst>
-              <a:gd name="adj1" fmla="val 50000"/>
-            </a:avLst>
-          </a:prstGeom>
-          <a:ln>
-            <a:tailEnd type="triangle"/>
-          </a:ln>
-        </p:spPr>
-        <p:style>
-          <a:lnRef idx="3">
-            <a:schemeClr val="accent2"/>
-          </a:lnRef>
-          <a:fillRef idx="0">
-            <a:schemeClr val="accent2"/>
-          </a:fillRef>
-          <a:effectRef idx="2">
-            <a:schemeClr val="accent2"/>
-          </a:effectRef>
-          <a:fontRef idx="minor">
-            <a:schemeClr val="tx1"/>
-          </a:fontRef>
-        </p:style>
-      </p:cxnSp>
-      <p:sp>
-        <p:nvSpPr>
-          <p:cNvPr id="40" name="TextBox 39">
-            <a:extLst>
-              <a:ext uri="{FF2B5EF4-FFF2-40B4-BE49-F238E27FC236}">
-                <a16:creationId xmlns:a16="http://schemas.microsoft.com/office/drawing/2014/main" id="{309DD171-3CF4-AD79-5E16-65C1470A7D45}"/>
-              </a:ext>
-            </a:extLst>
-          </p:cNvPr>
-          <p:cNvSpPr txBox="1"/>
-          <p:nvPr/>
-        </p:nvSpPr>
-        <p:spPr>
-          <a:xfrm>
-            <a:off x="4498744" y="2709418"/>
-            <a:ext cx="308098" cy="369332"/>
-          </a:xfrm>
-          <a:prstGeom prst="rect">
-            <a:avLst/>
-          </a:prstGeom>
-          <a:noFill/>
-        </p:spPr>
-        <p:txBody>
-          <a:bodyPr wrap="none" rtlCol="0">
-            <a:spAutoFit/>
-          </a:bodyPr>
-          <a:lstStyle/>
-          <a:p>
-            <a:r>
-              <a:rPr lang="en-CA" dirty="0"/>
-              <a:t>5</a:t>
-            </a:r>
-          </a:p>
-        </p:txBody>
-      </p:sp>
-      <p:sp>
-        <p:nvSpPr>
-          <p:cNvPr id="4" name="Rectangle: Rounded Corners 3">
-            <a:extLst>
-              <a:ext uri="{FF2B5EF4-FFF2-40B4-BE49-F238E27FC236}">
-                <a16:creationId xmlns:a16="http://schemas.microsoft.com/office/drawing/2014/main" id="{B4B25E1D-DEE8-4240-9717-DAB73D2776BC}"/>
-              </a:ext>
-            </a:extLst>
-          </p:cNvPr>
-          <p:cNvSpPr/>
-          <p:nvPr/>
-        </p:nvSpPr>
-        <p:spPr>
-          <a:xfrm>
-            <a:off x="3817005" y="3933156"/>
-            <a:ext cx="2472267" cy="770109"/>
-          </a:xfrm>
-          <a:prstGeom prst="roundRect">
-            <a:avLst/>
-          </a:prstGeom>
-          <a:ln w="57150"/>
-        </p:spPr>
-        <p:style>
-          <a:lnRef idx="2">
-            <a:schemeClr val="accent6"/>
-          </a:lnRef>
-          <a:fillRef idx="1">
-            <a:schemeClr val="lt1"/>
-          </a:fillRef>
-          <a:effectRef idx="0">
-            <a:schemeClr val="accent6"/>
-          </a:effectRef>
-          <a:fontRef idx="minor">
-            <a:schemeClr val="dk1"/>
-          </a:fontRef>
-        </p:style>
-        <p:txBody>
-          <a:bodyPr rtlCol="0" anchor="ctr"/>
-          <a:lstStyle/>
-          <a:p>
-            <a:pPr algn="ctr"/>
-            <a:r>
-              <a:rPr lang="en-CA" dirty="0" err="1"/>
-              <a:t>Fastapi</a:t>
-            </a:r>
-            <a:endParaRPr lang="en-CA" dirty="0"/>
-          </a:p>
-        </p:txBody>
-      </p:sp>
-      <p:sp>
-        <p:nvSpPr>
-          <p:cNvPr id="8" name="Rectangle: Rounded Corners 7">
-            <a:extLst>
-              <a:ext uri="{FF2B5EF4-FFF2-40B4-BE49-F238E27FC236}">
-                <a16:creationId xmlns:a16="http://schemas.microsoft.com/office/drawing/2014/main" id="{8F26CCF9-B99D-C54F-F215-56519F7AF050}"/>
-              </a:ext>
-            </a:extLst>
-          </p:cNvPr>
-          <p:cNvSpPr/>
-          <p:nvPr/>
-        </p:nvSpPr>
-        <p:spPr>
-          <a:xfrm>
-            <a:off x="1355841" y="1697552"/>
-            <a:ext cx="2472267" cy="770109"/>
-          </a:xfrm>
-          <a:prstGeom prst="roundRect">
-            <a:avLst/>
-          </a:prstGeom>
-          <a:ln w="57150"/>
-        </p:spPr>
-        <p:style>
-          <a:lnRef idx="2">
-            <a:schemeClr val="accent6"/>
-          </a:lnRef>
-          <a:fillRef idx="1">
-            <a:schemeClr val="lt1"/>
-          </a:fillRef>
-          <a:effectRef idx="0">
-            <a:schemeClr val="accent6"/>
-          </a:effectRef>
-          <a:fontRef idx="minor">
-            <a:schemeClr val="dk1"/>
-          </a:fontRef>
-        </p:style>
-        <p:txBody>
-          <a:bodyPr rtlCol="0" anchor="ctr"/>
-          <a:lstStyle/>
-          <a:p>
-            <a:pPr algn="ctr"/>
-            <a:r>
-              <a:rPr lang="en-CA" dirty="0" err="1"/>
-              <a:t>Dvc</a:t>
-            </a:r>
-            <a:r>
-              <a:rPr lang="en-CA" dirty="0"/>
-              <a:t> server:</a:t>
-            </a:r>
-          </a:p>
-          <a:p>
-            <a:pPr algn="ctr"/>
-            <a:r>
-              <a:rPr lang="en-CA" dirty="0"/>
-              <a:t> min-io</a:t>
-            </a:r>
-          </a:p>
-        </p:txBody>
-      </p:sp>
-      <p:cxnSp>
-        <p:nvCxnSpPr>
-          <p:cNvPr id="21" name="Connector: Elbow 20">
-            <a:extLst>
-              <a:ext uri="{FF2B5EF4-FFF2-40B4-BE49-F238E27FC236}">
-                <a16:creationId xmlns:a16="http://schemas.microsoft.com/office/drawing/2014/main" id="{E83CFE83-F866-3FDB-D3EA-95AB267EC96B}"/>
-              </a:ext>
-            </a:extLst>
-          </p:cNvPr>
-          <p:cNvCxnSpPr>
-            <a:cxnSpLocks/>
-            <a:stCxn id="8" idx="3"/>
-            <a:endCxn id="7" idx="2"/>
-          </p:cNvCxnSpPr>
-          <p:nvPr/>
-        </p:nvCxnSpPr>
-        <p:spPr>
-          <a:xfrm>
-            <a:off x="3828108" y="2082607"/>
-            <a:ext cx="4155958" cy="1319160"/>
-          </a:xfrm>
-          <a:prstGeom prst="bentConnector3">
-            <a:avLst>
-              <a:gd name="adj1" fmla="val 31416"/>
-            </a:avLst>
-          </a:prstGeom>
-          <a:ln>
-            <a:tailEnd type="triangle"/>
-          </a:ln>
-        </p:spPr>
-        <p:style>
-          <a:lnRef idx="3">
-            <a:schemeClr val="accent2"/>
-          </a:lnRef>
-          <a:fillRef idx="0">
-            <a:schemeClr val="accent2"/>
-          </a:fillRef>
-          <a:effectRef idx="2">
-            <a:schemeClr val="accent2"/>
-          </a:effectRef>
-          <a:fontRef idx="minor">
-            <a:schemeClr val="tx1"/>
-          </a:fontRef>
-        </p:style>
-      </p:cxnSp>
-      <p:sp>
-        <p:nvSpPr>
-          <p:cNvPr id="74" name="TextBox 73">
-            <a:extLst>
-              <a:ext uri="{FF2B5EF4-FFF2-40B4-BE49-F238E27FC236}">
-                <a16:creationId xmlns:a16="http://schemas.microsoft.com/office/drawing/2014/main" id="{40B6F72E-99E5-B2D7-855D-C64F96FA4B08}"/>
-              </a:ext>
-            </a:extLst>
-          </p:cNvPr>
-          <p:cNvSpPr txBox="1"/>
-          <p:nvPr/>
-        </p:nvSpPr>
-        <p:spPr>
-          <a:xfrm>
-            <a:off x="4723833" y="4917531"/>
-            <a:ext cx="308098" cy="369332"/>
-          </a:xfrm>
-          <a:prstGeom prst="rect">
-            <a:avLst/>
-          </a:prstGeom>
-          <a:noFill/>
-        </p:spPr>
-        <p:txBody>
-          <a:bodyPr wrap="none" rtlCol="0">
-            <a:spAutoFit/>
-          </a:bodyPr>
-          <a:lstStyle/>
-          <a:p>
-            <a:r>
-              <a:rPr lang="en-CA" dirty="0"/>
-              <a:t>6</a:t>
-            </a:r>
-          </a:p>
-        </p:txBody>
-      </p:sp>
-      <p:cxnSp>
-        <p:nvCxnSpPr>
-          <p:cNvPr id="80" name="Connector: Elbow 79">
-            <a:extLst>
-              <a:ext uri="{FF2B5EF4-FFF2-40B4-BE49-F238E27FC236}">
-                <a16:creationId xmlns:a16="http://schemas.microsoft.com/office/drawing/2014/main" id="{6BE45824-7E88-5E27-9337-87DCC8356BEB}"/>
-              </a:ext>
-            </a:extLst>
-          </p:cNvPr>
-          <p:cNvCxnSpPr>
-            <a:stCxn id="4" idx="2"/>
-            <a:endCxn id="38" idx="3"/>
-          </p:cNvCxnSpPr>
-          <p:nvPr/>
-        </p:nvCxnSpPr>
-        <p:spPr>
-          <a:xfrm rot="5400000">
-            <a:off x="3889907" y="4139353"/>
-            <a:ext cx="599321" cy="1727144"/>
-          </a:xfrm>
-          <a:prstGeom prst="bentConnector2">
-            <a:avLst/>
-          </a:prstGeom>
-          <a:ln w="19050" cap="flat" cmpd="sng" algn="ctr">
+          <a:ln w="38100" cap="sq">
             <a:solidFill>
-              <a:schemeClr val="accent2"/>
+              <a:srgbClr val="000000"/>
             </a:solidFill>
             <a:prstDash val="solid"/>
-            <a:round/>
-            <a:headEnd type="none" w="med" len="med"/>
-            <a:tailEnd type="arrow" w="med" len="med"/>
+            <a:miter lim="800000"/>
           </a:ln>
-        </p:spPr>
-        <p:style>
-          <a:lnRef idx="0">
-            <a:scrgbClr r="0" g="0" b="0"/>
-          </a:lnRef>
-          <a:fillRef idx="0">
-            <a:scrgbClr r="0" g="0" b="0"/>
-          </a:fillRef>
-          <a:effectRef idx="0">
-            <a:scrgbClr r="0" g="0" b="0"/>
-          </a:effectRef>
-          <a:fontRef idx="minor">
-            <a:schemeClr val="tx1"/>
-          </a:fontRef>
-        </p:style>
-      </p:cxnSp>
+          <a:effectLst>
+            <a:outerShdw blurRad="50800" dist="38100" dir="2700000" algn="tl" rotWithShape="0">
+              <a:srgbClr val="000000">
+                <a:alpha val="43000"/>
+              </a:srgbClr>
+            </a:outerShdw>
+          </a:effectLst>
+        </p:spPr>
+      </p:pic>
     </p:spTree>
     <p:extLst>
       <p:ext uri="{BB962C8B-B14F-4D97-AF65-F5344CB8AC3E}">
-        <p14:creationId xmlns:p14="http://schemas.microsoft.com/office/powerpoint/2010/main" val="956957177"/>
+        <p14:creationId xmlns:p14="http://schemas.microsoft.com/office/powerpoint/2010/main" val="3944641747"/>
       </p:ext>
     </p:extLst>
   </p:cSld>
@@ -4426,7 +3633,7 @@
           <p:cNvPr id="2" name="Title 1">
             <a:extLst>
               <a:ext uri="{FF2B5EF4-FFF2-40B4-BE49-F238E27FC236}">
-                <a16:creationId xmlns:a16="http://schemas.microsoft.com/office/drawing/2014/main" id="{7289FA49-DBA6-0018-2AE4-9BC5009E7CBF}"/>
+                <a16:creationId xmlns:a16="http://schemas.microsoft.com/office/drawing/2014/main" id="{28CD3119-EA80-FE85-5651-C98587F6E406}"/>
               </a:ext>
             </a:extLst>
           </p:cNvPr>
@@ -4443,9 +3650,10 @@
           <a:lstStyle/>
           <a:p>
             <a:r>
-              <a:rPr lang="en-CA" dirty="0"/>
-              <a:t>Process </a:t>
-            </a:r>
+              <a:rPr lang="en-CA" dirty="0" err="1"/>
+              <a:t>Contraintes</a:t>
+            </a:r>
+            <a:endParaRPr lang="en-CA" dirty="0"/>
           </a:p>
         </p:txBody>
       </p:sp>
@@ -4454,7 +3662,7 @@
           <p:cNvPr id="3" name="Content Placeholder 2">
             <a:extLst>
               <a:ext uri="{FF2B5EF4-FFF2-40B4-BE49-F238E27FC236}">
-                <a16:creationId xmlns:a16="http://schemas.microsoft.com/office/drawing/2014/main" id="{F63B14D5-D649-A70D-8846-5A3A314197E4}"/>
+                <a16:creationId xmlns:a16="http://schemas.microsoft.com/office/drawing/2014/main" id="{D6F8FA68-D9CF-DC27-A34A-38ED343F41BF}"/>
               </a:ext>
             </a:extLst>
           </p:cNvPr>
@@ -4467,279 +3675,2684 @@
         </p:nvSpPr>
         <p:spPr/>
         <p:txBody>
-          <a:bodyPr>
-            <a:normAutofit/>
-          </a:bodyPr>
-          <a:lstStyle/>
-          <a:p>
-            <a:pPr marL="342900" indent="-342900">
-              <a:buFont typeface="+mj-lt"/>
-              <a:buAutoNum type="arabicPeriod"/>
-            </a:pPr>
-            <a:r>
-              <a:rPr lang="en-CA" sz="1800" dirty="0"/>
-              <a:t>Le service de recuperation </a:t>
-            </a:r>
-            <a:r>
-              <a:rPr lang="en-CA" sz="1800" dirty="0" err="1"/>
-              <a:t>consulte</a:t>
-            </a:r>
-            <a:r>
-              <a:rPr lang="en-CA" sz="1800" dirty="0"/>
+          <a:bodyPr/>
+          <a:lstStyle/>
+          <a:p>
+            <a:r>
+              <a:rPr lang="en-CA" dirty="0"/>
+              <a:t>Mini-ensemble de données =&gt; </a:t>
+            </a:r>
+          </a:p>
+          <a:p>
+            <a:r>
+              <a:rPr lang="en-CA" dirty="0"/>
+              <a:t>Nouvelles generations </a:t>
+            </a:r>
+            <a:r>
+              <a:rPr lang="en-CA" dirty="0" err="1"/>
+              <a:t>chaque</a:t>
+            </a:r>
+            <a:r>
+              <a:rPr lang="en-CA" dirty="0"/>
+              <a:t> 15 minutes</a:t>
+            </a:r>
+          </a:p>
+          <a:p>
+            <a:r>
+              <a:rPr lang="en-CA" dirty="0" err="1"/>
+              <a:t>Donnees</a:t>
+            </a:r>
+            <a:r>
+              <a:rPr lang="en-CA" dirty="0"/>
+              <a:t> au format Json a parser </a:t>
+            </a:r>
+          </a:p>
+          <a:p>
+            <a:r>
+              <a:rPr lang="en-CA" dirty="0" err="1"/>
+              <a:t>Donnees</a:t>
+            </a:r>
+            <a:r>
+              <a:rPr lang="en-CA" dirty="0"/>
+              <a:t> mixte : </a:t>
+            </a:r>
+            <a:r>
+              <a:rPr lang="en-CA" dirty="0" err="1"/>
+              <a:t>numerique</a:t>
+            </a:r>
+            <a:r>
+              <a:rPr lang="en-CA" dirty="0"/>
+              <a:t> &amp; </a:t>
+            </a:r>
+            <a:r>
+              <a:rPr lang="en-CA" dirty="0" err="1"/>
+              <a:t>categorique</a:t>
+            </a:r>
+            <a:r>
+              <a:rPr lang="en-CA" dirty="0"/>
               <a:t> </a:t>
             </a:r>
-            <a:r>
-              <a:rPr lang="en-CA" sz="1800" dirty="0" err="1"/>
-              <a:t>regulierement</a:t>
-            </a:r>
-            <a:r>
-              <a:rPr lang="en-CA" sz="1800" dirty="0"/>
-              <a:t> </a:t>
-            </a:r>
-            <a:r>
-              <a:rPr lang="en-CA" sz="1800" dirty="0" err="1"/>
-              <a:t>l’api</a:t>
-            </a:r>
-            <a:r>
-              <a:rPr lang="en-CA" sz="1800" dirty="0"/>
-              <a:t> </a:t>
-            </a:r>
-            <a:r>
-              <a:rPr lang="en-CA" sz="1800" dirty="0" err="1"/>
-              <a:t>d’hydro-quebec</a:t>
-            </a:r>
-            <a:r>
-              <a:rPr lang="en-CA" sz="1800" dirty="0"/>
-              <a:t> </a:t>
-            </a:r>
-            <a:r>
-              <a:rPr lang="en-CA" sz="1800" dirty="0" err="1"/>
-              <a:t>afin</a:t>
-            </a:r>
-            <a:r>
-              <a:rPr lang="en-CA" sz="1800" dirty="0"/>
-              <a:t> de </a:t>
-            </a:r>
-            <a:r>
-              <a:rPr lang="en-CA" sz="1800" dirty="0" err="1"/>
-              <a:t>recuperer</a:t>
-            </a:r>
-            <a:r>
-              <a:rPr lang="en-CA" sz="1800" dirty="0"/>
-              <a:t> les </a:t>
-            </a:r>
-            <a:r>
-              <a:rPr lang="en-CA" sz="1800" dirty="0" err="1"/>
-              <a:t>donnees</a:t>
-            </a:r>
-            <a:endParaRPr lang="en-CA" sz="1800" dirty="0"/>
-          </a:p>
-          <a:p>
-            <a:pPr marL="342900" indent="-342900">
-              <a:buFont typeface="+mj-lt"/>
-              <a:buAutoNum type="arabicPeriod"/>
-            </a:pPr>
-            <a:r>
-              <a:rPr lang="en-CA" sz="1800" dirty="0"/>
-              <a:t>Une </a:t>
-            </a:r>
-            <a:r>
-              <a:rPr lang="en-CA" sz="1800" dirty="0" err="1"/>
-              <a:t>fois</a:t>
-            </a:r>
-            <a:r>
-              <a:rPr lang="en-CA" sz="1800" dirty="0"/>
-              <a:t> les </a:t>
-            </a:r>
-            <a:r>
-              <a:rPr lang="en-CA" sz="1800" dirty="0" err="1"/>
-              <a:t>donnees</a:t>
-            </a:r>
-            <a:r>
-              <a:rPr lang="en-CA" sz="1800" dirty="0"/>
-              <a:t> </a:t>
-            </a:r>
-            <a:r>
-              <a:rPr lang="en-CA" sz="1800" dirty="0" err="1"/>
-              <a:t>recuperees</a:t>
-            </a:r>
-            <a:r>
-              <a:rPr lang="en-CA" sz="1800" dirty="0"/>
-              <a:t> </a:t>
-            </a:r>
-            <a:r>
-              <a:rPr lang="en-CA" sz="1800" dirty="0" err="1"/>
-              <a:t>elles</a:t>
-            </a:r>
-            <a:r>
-              <a:rPr lang="en-CA" sz="1800" dirty="0"/>
-              <a:t> </a:t>
-            </a:r>
-            <a:r>
-              <a:rPr lang="en-CA" sz="1800" dirty="0" err="1"/>
-              <a:t>seront</a:t>
-            </a:r>
-            <a:r>
-              <a:rPr lang="en-CA" sz="1800" dirty="0"/>
-              <a:t> </a:t>
-            </a:r>
-            <a:r>
-              <a:rPr lang="en-CA" sz="1800" dirty="0" err="1"/>
-              <a:t>validees</a:t>
-            </a:r>
-            <a:r>
-              <a:rPr lang="en-CA" sz="1800" dirty="0"/>
-              <a:t> et </a:t>
-            </a:r>
-            <a:r>
-              <a:rPr lang="en-CA" sz="1800" dirty="0" err="1"/>
-              <a:t>injectees</a:t>
-            </a:r>
-            <a:r>
-              <a:rPr lang="en-CA" sz="1800" dirty="0"/>
-              <a:t> </a:t>
-            </a:r>
-            <a:r>
-              <a:rPr lang="en-CA" sz="1800" dirty="0" err="1"/>
-              <a:t>en</a:t>
-            </a:r>
-            <a:r>
-              <a:rPr lang="en-CA" sz="1800" dirty="0"/>
-              <a:t> bd </a:t>
-            </a:r>
-          </a:p>
-          <a:p>
-            <a:pPr marL="342900" indent="-342900">
-              <a:buFont typeface="+mj-lt"/>
-              <a:buAutoNum type="arabicPeriod"/>
-            </a:pPr>
-            <a:r>
-              <a:rPr lang="en-CA" sz="1800" dirty="0"/>
-              <a:t>En </a:t>
-            </a:r>
-            <a:r>
-              <a:rPr lang="en-CA" sz="1800" dirty="0" err="1"/>
-              <a:t>parallele</a:t>
-            </a:r>
-            <a:r>
-              <a:rPr lang="en-CA" sz="1800" dirty="0"/>
-              <a:t> un </a:t>
-            </a:r>
-            <a:r>
-              <a:rPr lang="en-CA" sz="1800" dirty="0" err="1"/>
-              <a:t>autre</a:t>
-            </a:r>
-            <a:r>
-              <a:rPr lang="en-CA" sz="1800" dirty="0"/>
-              <a:t> service </a:t>
-            </a:r>
-            <a:r>
-              <a:rPr lang="en-CA" sz="1800" dirty="0" err="1"/>
-              <a:t>exploite</a:t>
-            </a:r>
-            <a:r>
-              <a:rPr lang="en-CA" sz="1800" dirty="0"/>
-              <a:t> les </a:t>
-            </a:r>
-            <a:r>
-              <a:rPr lang="en-CA" sz="1800" dirty="0" err="1"/>
-              <a:t>donnees</a:t>
-            </a:r>
-            <a:r>
-              <a:rPr lang="en-CA" sz="1800" dirty="0"/>
-              <a:t> </a:t>
-            </a:r>
-            <a:r>
-              <a:rPr lang="en-CA" sz="1800" dirty="0" err="1"/>
-              <a:t>injectes</a:t>
-            </a:r>
-            <a:r>
-              <a:rPr lang="en-CA" sz="1800" dirty="0"/>
-              <a:t> </a:t>
-            </a:r>
-            <a:r>
-              <a:rPr lang="en-CA" sz="1800" dirty="0" err="1"/>
-              <a:t>en</a:t>
-            </a:r>
-            <a:r>
-              <a:rPr lang="en-CA" sz="1800" dirty="0"/>
-              <a:t> bd pour entrainer un </a:t>
-            </a:r>
-            <a:r>
-              <a:rPr lang="en-CA" sz="1800" dirty="0" err="1"/>
-              <a:t>modele</a:t>
-            </a:r>
-            <a:r>
-              <a:rPr lang="en-CA" sz="1800" dirty="0"/>
-              <a:t> </a:t>
-            </a:r>
-          </a:p>
-          <a:p>
-            <a:pPr marL="342900" indent="-342900">
-              <a:buFont typeface="+mj-lt"/>
-              <a:buAutoNum type="arabicPeriod"/>
-            </a:pPr>
-            <a:r>
-              <a:rPr lang="en-CA" sz="1800" dirty="0"/>
-              <a:t>Les </a:t>
-            </a:r>
-            <a:r>
-              <a:rPr lang="en-CA" sz="1800" dirty="0" err="1"/>
-              <a:t>donnees</a:t>
-            </a:r>
-            <a:r>
-              <a:rPr lang="en-CA" sz="1800" dirty="0"/>
-              <a:t> </a:t>
-            </a:r>
-            <a:r>
-              <a:rPr lang="en-CA" sz="1800" dirty="0" err="1"/>
-              <a:t>d’entrainement</a:t>
-            </a:r>
-            <a:r>
-              <a:rPr lang="en-CA" sz="1800" dirty="0"/>
-              <a:t> </a:t>
-            </a:r>
-            <a:r>
-              <a:rPr lang="en-CA" sz="1800" dirty="0" err="1"/>
-              <a:t>seront</a:t>
-            </a:r>
-            <a:r>
-              <a:rPr lang="en-CA" sz="1800" dirty="0"/>
-              <a:t> ensuites </a:t>
-            </a:r>
-            <a:r>
-              <a:rPr lang="en-CA" sz="1800" dirty="0" err="1"/>
-              <a:t>versionnees</a:t>
-            </a:r>
-            <a:r>
-              <a:rPr lang="en-CA" sz="1800" dirty="0"/>
-              <a:t> et par </a:t>
-            </a:r>
-            <a:r>
-              <a:rPr lang="en-CA" sz="1800" dirty="0" err="1"/>
-              <a:t>Mlflow</a:t>
-            </a:r>
-            <a:r>
-              <a:rPr lang="en-CA" sz="1800" dirty="0"/>
-              <a:t> </a:t>
-            </a:r>
-          </a:p>
-          <a:p>
-            <a:pPr marL="342900" indent="-342900">
-              <a:buFont typeface="+mj-lt"/>
-              <a:buAutoNum type="arabicPeriod"/>
-            </a:pPr>
-            <a:r>
-              <a:rPr lang="en-CA" sz="1800" dirty="0"/>
-              <a:t> </a:t>
-            </a:r>
+          </a:p>
+          <a:p>
+            <a:endParaRPr lang="en-CA" dirty="0"/>
           </a:p>
         </p:txBody>
       </p:sp>
     </p:spTree>
     <p:extLst>
       <p:ext uri="{BB962C8B-B14F-4D97-AF65-F5344CB8AC3E}">
-        <p14:creationId xmlns:p14="http://schemas.microsoft.com/office/powerpoint/2010/main" val="3543374247"/>
+        <p14:creationId xmlns:p14="http://schemas.microsoft.com/office/powerpoint/2010/main" val="3414733754"/>
+      </p:ext>
+    </p:extLst>
+  </p:cSld>
+  <p:clrMapOvr>
+    <a:masterClrMapping/>
+  </p:clrMapOvr>
+</p:sld>
+</file>
+
+<file path=ppt/slides/slide3.xml><?xml version="1.0" encoding="utf-8"?>
+<p:sld xmlns:a="http://schemas.openxmlformats.org/drawingml/2006/main" xmlns:r="http://schemas.openxmlformats.org/officeDocument/2006/relationships" xmlns:p="http://schemas.openxmlformats.org/presentationml/2006/main">
+  <p:cSld>
+    <p:spTree>
+      <p:nvGrpSpPr>
+        <p:cNvPr id="1" name=""/>
+        <p:cNvGrpSpPr/>
+        <p:nvPr/>
+      </p:nvGrpSpPr>
+      <p:grpSpPr>
+        <a:xfrm>
+          <a:off x="0" y="0"/>
+          <a:ext cx="0" cy="0"/>
+          <a:chOff x="0" y="0"/>
+          <a:chExt cx="0" cy="0"/>
+        </a:xfrm>
+      </p:grpSpPr>
+      <p:sp>
+        <p:nvSpPr>
+          <p:cNvPr id="7" name="Flowchart: Magnetic Disk 6">
+            <a:extLst>
+              <a:ext uri="{FF2B5EF4-FFF2-40B4-BE49-F238E27FC236}">
+                <a16:creationId xmlns:a16="http://schemas.microsoft.com/office/drawing/2014/main" id="{5AE86618-411A-11BE-8832-FC4C16B50E0F}"/>
+              </a:ext>
+            </a:extLst>
+          </p:cNvPr>
+          <p:cNvSpPr/>
+          <p:nvPr/>
+        </p:nvSpPr>
+        <p:spPr>
+          <a:xfrm>
+            <a:off x="7984066" y="2597434"/>
+            <a:ext cx="1540933" cy="1608666"/>
+          </a:xfrm>
+          <a:prstGeom prst="flowChartMagneticDisk">
+            <a:avLst/>
+          </a:prstGeom>
+        </p:spPr>
+        <p:style>
+          <a:lnRef idx="3">
+            <a:schemeClr val="lt1"/>
+          </a:lnRef>
+          <a:fillRef idx="1">
+            <a:schemeClr val="accent2"/>
+          </a:fillRef>
+          <a:effectRef idx="1">
+            <a:schemeClr val="accent2"/>
+          </a:effectRef>
+          <a:fontRef idx="minor">
+            <a:schemeClr val="lt1"/>
+          </a:fontRef>
+        </p:style>
+        <p:txBody>
+          <a:bodyPr rtlCol="0" anchor="ctr"/>
+          <a:lstStyle/>
+          <a:p>
+            <a:pPr algn="ctr"/>
+            <a:r>
+              <a:rPr lang="en-CA" dirty="0"/>
+              <a:t>Database</a:t>
+            </a:r>
+          </a:p>
+        </p:txBody>
+      </p:sp>
+      <p:sp>
+        <p:nvSpPr>
+          <p:cNvPr id="9" name="Lightning Bolt 8">
+            <a:extLst>
+              <a:ext uri="{FF2B5EF4-FFF2-40B4-BE49-F238E27FC236}">
+                <a16:creationId xmlns:a16="http://schemas.microsoft.com/office/drawing/2014/main" id="{3C2B9955-FDE3-2123-208A-7E46A6400683}"/>
+              </a:ext>
+            </a:extLst>
+          </p:cNvPr>
+          <p:cNvSpPr/>
+          <p:nvPr/>
+        </p:nvSpPr>
+        <p:spPr>
+          <a:xfrm rot="899964">
+            <a:off x="10414000" y="1634067"/>
+            <a:ext cx="905933" cy="2387600"/>
+          </a:xfrm>
+          <a:prstGeom prst="lightningBolt">
+            <a:avLst/>
+          </a:prstGeom>
+        </p:spPr>
+        <p:style>
+          <a:lnRef idx="2">
+            <a:schemeClr val="accent1"/>
+          </a:lnRef>
+          <a:fillRef idx="1">
+            <a:schemeClr val="lt1"/>
+          </a:fillRef>
+          <a:effectRef idx="0">
+            <a:schemeClr val="accent1"/>
+          </a:effectRef>
+          <a:fontRef idx="minor">
+            <a:schemeClr val="dk1"/>
+          </a:fontRef>
+        </p:style>
+        <p:txBody>
+          <a:bodyPr rtlCol="0" anchor="ctr"/>
+          <a:lstStyle/>
+          <a:p>
+            <a:pPr algn="ctr"/>
+            <a:endParaRPr lang="en-CA" dirty="0"/>
+          </a:p>
+        </p:txBody>
+      </p:sp>
+      <p:sp>
+        <p:nvSpPr>
+          <p:cNvPr id="10" name="TextBox 9">
+            <a:extLst>
+              <a:ext uri="{FF2B5EF4-FFF2-40B4-BE49-F238E27FC236}">
+                <a16:creationId xmlns:a16="http://schemas.microsoft.com/office/drawing/2014/main" id="{F8D112E4-147E-AF1D-D1F2-2B0BB576E2EF}"/>
+              </a:ext>
+            </a:extLst>
+          </p:cNvPr>
+          <p:cNvSpPr txBox="1"/>
+          <p:nvPr/>
+        </p:nvSpPr>
+        <p:spPr>
+          <a:xfrm>
+            <a:off x="10120467" y="4402667"/>
+            <a:ext cx="1612364" cy="369332"/>
+          </a:xfrm>
+          <a:prstGeom prst="rect">
+            <a:avLst/>
+          </a:prstGeom>
+          <a:noFill/>
+        </p:spPr>
+        <p:txBody>
+          <a:bodyPr wrap="none" rtlCol="0">
+            <a:spAutoFit/>
+          </a:bodyPr>
+          <a:lstStyle/>
+          <a:p>
+            <a:r>
+              <a:rPr lang="en-CA" dirty="0"/>
+              <a:t>Hydro-</a:t>
+            </a:r>
+            <a:r>
+              <a:rPr lang="en-CA" dirty="0" err="1"/>
+              <a:t>quebec</a:t>
+            </a:r>
+            <a:endParaRPr lang="en-CA" dirty="0"/>
+          </a:p>
+        </p:txBody>
+      </p:sp>
+      <p:sp>
+        <p:nvSpPr>
+          <p:cNvPr id="11" name="Rectangle: Rounded Corners 10">
+            <a:extLst>
+              <a:ext uri="{FF2B5EF4-FFF2-40B4-BE49-F238E27FC236}">
+                <a16:creationId xmlns:a16="http://schemas.microsoft.com/office/drawing/2014/main" id="{A9151A12-9A76-4E9E-047F-01B5CC697288}"/>
+              </a:ext>
+            </a:extLst>
+          </p:cNvPr>
+          <p:cNvSpPr/>
+          <p:nvPr/>
+        </p:nvSpPr>
+        <p:spPr>
+          <a:xfrm>
+            <a:off x="6342149" y="918791"/>
+            <a:ext cx="2207889" cy="770109"/>
+          </a:xfrm>
+          <a:prstGeom prst="roundRect">
+            <a:avLst/>
+          </a:prstGeom>
+          <a:ln w="57150"/>
+        </p:spPr>
+        <p:style>
+          <a:lnRef idx="2">
+            <a:schemeClr val="accent6"/>
+          </a:lnRef>
+          <a:fillRef idx="1">
+            <a:schemeClr val="lt1"/>
+          </a:fillRef>
+          <a:effectRef idx="0">
+            <a:schemeClr val="accent6"/>
+          </a:effectRef>
+          <a:fontRef idx="minor">
+            <a:schemeClr val="dk1"/>
+          </a:fontRef>
+        </p:style>
+        <p:txBody>
+          <a:bodyPr rtlCol="0" anchor="ctr"/>
+          <a:lstStyle/>
+          <a:p>
+            <a:pPr algn="ctr"/>
+            <a:r>
+              <a:rPr lang="en-CA" dirty="0"/>
+              <a:t>Service de </a:t>
+            </a:r>
+            <a:r>
+              <a:rPr lang="en-CA" dirty="0" err="1"/>
+              <a:t>recup</a:t>
+            </a:r>
+            <a:r>
+              <a:rPr lang="en-CA" dirty="0"/>
+              <a:t> de </a:t>
+            </a:r>
+            <a:r>
+              <a:rPr lang="en-CA" dirty="0" err="1"/>
+              <a:t>donnee</a:t>
+            </a:r>
+            <a:r>
+              <a:rPr lang="en-CA" dirty="0"/>
+              <a:t> (each 3mn)</a:t>
+            </a:r>
+          </a:p>
+        </p:txBody>
+      </p:sp>
+      <p:cxnSp>
+        <p:nvCxnSpPr>
+          <p:cNvPr id="14" name="Connector: Elbow 13">
+            <a:extLst>
+              <a:ext uri="{FF2B5EF4-FFF2-40B4-BE49-F238E27FC236}">
+                <a16:creationId xmlns:a16="http://schemas.microsoft.com/office/drawing/2014/main" id="{022CE446-8D56-5A89-E7A6-921700C6985E}"/>
+              </a:ext>
+            </a:extLst>
+          </p:cNvPr>
+          <p:cNvCxnSpPr>
+            <a:cxnSpLocks/>
+            <a:stCxn id="11" idx="3"/>
+            <a:endCxn id="9" idx="2"/>
+          </p:cNvCxnSpPr>
+          <p:nvPr/>
+        </p:nvCxnSpPr>
+        <p:spPr>
+          <a:xfrm>
+            <a:off x="8550038" y="1303846"/>
+            <a:ext cx="2114174" cy="1344388"/>
+          </a:xfrm>
+          <a:prstGeom prst="bentConnector3">
+            <a:avLst>
+              <a:gd name="adj1" fmla="val 50000"/>
+            </a:avLst>
+          </a:prstGeom>
+          <a:ln>
+            <a:tailEnd type="triangle"/>
+          </a:ln>
+        </p:spPr>
+        <p:style>
+          <a:lnRef idx="3">
+            <a:schemeClr val="accent2"/>
+          </a:lnRef>
+          <a:fillRef idx="0">
+            <a:schemeClr val="accent2"/>
+          </a:fillRef>
+          <a:effectRef idx="2">
+            <a:schemeClr val="accent2"/>
+          </a:effectRef>
+          <a:fontRef idx="minor">
+            <a:schemeClr val="tx1"/>
+          </a:fontRef>
+        </p:style>
+      </p:cxnSp>
+      <p:cxnSp>
+        <p:nvCxnSpPr>
+          <p:cNvPr id="16" name="Connector: Elbow 15">
+            <a:extLst>
+              <a:ext uri="{FF2B5EF4-FFF2-40B4-BE49-F238E27FC236}">
+                <a16:creationId xmlns:a16="http://schemas.microsoft.com/office/drawing/2014/main" id="{881D22CF-7D1D-D41C-9A95-A844BB7F5123}"/>
+              </a:ext>
+            </a:extLst>
+          </p:cNvPr>
+          <p:cNvCxnSpPr>
+            <a:cxnSpLocks/>
+            <a:stCxn id="11" idx="2"/>
+            <a:endCxn id="7" idx="2"/>
+          </p:cNvCxnSpPr>
+          <p:nvPr/>
+        </p:nvCxnSpPr>
+        <p:spPr>
+          <a:xfrm rot="16200000" flipH="1">
+            <a:off x="6858647" y="2276347"/>
+            <a:ext cx="1712867" cy="537972"/>
+          </a:xfrm>
+          <a:prstGeom prst="bentConnector2">
+            <a:avLst/>
+          </a:prstGeom>
+          <a:ln>
+            <a:tailEnd type="triangle"/>
+          </a:ln>
+        </p:spPr>
+        <p:style>
+          <a:lnRef idx="3">
+            <a:schemeClr val="accent2"/>
+          </a:lnRef>
+          <a:fillRef idx="0">
+            <a:schemeClr val="accent2"/>
+          </a:fillRef>
+          <a:effectRef idx="2">
+            <a:schemeClr val="accent2"/>
+          </a:effectRef>
+          <a:fontRef idx="minor">
+            <a:schemeClr val="tx1"/>
+          </a:fontRef>
+        </p:style>
+      </p:cxnSp>
+      <p:sp>
+        <p:nvSpPr>
+          <p:cNvPr id="18" name="TextBox 17">
+            <a:extLst>
+              <a:ext uri="{FF2B5EF4-FFF2-40B4-BE49-F238E27FC236}">
+                <a16:creationId xmlns:a16="http://schemas.microsoft.com/office/drawing/2014/main" id="{01570418-1F05-30E0-052E-54C849B4370B}"/>
+              </a:ext>
+            </a:extLst>
+          </p:cNvPr>
+          <p:cNvSpPr txBox="1"/>
+          <p:nvPr/>
+        </p:nvSpPr>
+        <p:spPr>
+          <a:xfrm>
+            <a:off x="9297810" y="1504233"/>
+            <a:ext cx="308098" cy="369332"/>
+          </a:xfrm>
+          <a:prstGeom prst="rect">
+            <a:avLst/>
+          </a:prstGeom>
+          <a:noFill/>
+        </p:spPr>
+        <p:txBody>
+          <a:bodyPr wrap="none" rtlCol="0">
+            <a:spAutoFit/>
+          </a:bodyPr>
+          <a:lstStyle/>
+          <a:p>
+            <a:r>
+              <a:rPr lang="en-CA" dirty="0"/>
+              <a:t>1</a:t>
+            </a:r>
+          </a:p>
+        </p:txBody>
+      </p:sp>
+      <p:sp>
+        <p:nvSpPr>
+          <p:cNvPr id="20" name="TextBox 19">
+            <a:extLst>
+              <a:ext uri="{FF2B5EF4-FFF2-40B4-BE49-F238E27FC236}">
+                <a16:creationId xmlns:a16="http://schemas.microsoft.com/office/drawing/2014/main" id="{A528A61C-01EB-C7EE-36BB-34F96F55F4C7}"/>
+              </a:ext>
+            </a:extLst>
+          </p:cNvPr>
+          <p:cNvSpPr txBox="1"/>
+          <p:nvPr/>
+        </p:nvSpPr>
+        <p:spPr>
+          <a:xfrm>
+            <a:off x="7475260" y="1958501"/>
+            <a:ext cx="308098" cy="369332"/>
+          </a:xfrm>
+          <a:prstGeom prst="rect">
+            <a:avLst/>
+          </a:prstGeom>
+          <a:noFill/>
+        </p:spPr>
+        <p:txBody>
+          <a:bodyPr wrap="none" rtlCol="0">
+            <a:spAutoFit/>
+          </a:bodyPr>
+          <a:lstStyle/>
+          <a:p>
+            <a:r>
+              <a:rPr lang="en-CA" dirty="0"/>
+              <a:t>2</a:t>
+            </a:r>
+          </a:p>
+        </p:txBody>
+      </p:sp>
+    </p:spTree>
+    <p:extLst>
+      <p:ext uri="{BB962C8B-B14F-4D97-AF65-F5344CB8AC3E}">
+        <p14:creationId xmlns:p14="http://schemas.microsoft.com/office/powerpoint/2010/main" val="956957177"/>
+      </p:ext>
+    </p:extLst>
+  </p:cSld>
+  <p:clrMapOvr>
+    <a:masterClrMapping/>
+  </p:clrMapOvr>
+</p:sld>
+</file>
+
+<file path=ppt/slides/slide4.xml><?xml version="1.0" encoding="utf-8"?>
+<p:sld xmlns:a="http://schemas.openxmlformats.org/drawingml/2006/main" xmlns:r="http://schemas.openxmlformats.org/officeDocument/2006/relationships" xmlns:p="http://schemas.openxmlformats.org/presentationml/2006/main">
+  <p:cSld>
+    <p:spTree>
+      <p:nvGrpSpPr>
+        <p:cNvPr id="1" name="">
+          <a:extLst>
+            <a:ext uri="{FF2B5EF4-FFF2-40B4-BE49-F238E27FC236}">
+              <a16:creationId xmlns:a16="http://schemas.microsoft.com/office/drawing/2014/main" id="{DDAE5E70-F24B-D022-5914-72C5137DEFC5}"/>
+            </a:ext>
+          </a:extLst>
+        </p:cNvPr>
+        <p:cNvGrpSpPr/>
+        <p:nvPr/>
+      </p:nvGrpSpPr>
+      <p:grpSpPr>
+        <a:xfrm>
+          <a:off x="0" y="0"/>
+          <a:ext cx="0" cy="0"/>
+          <a:chOff x="0" y="0"/>
+          <a:chExt cx="0" cy="0"/>
+        </a:xfrm>
+      </p:grpSpPr>
+      <p:sp>
+        <p:nvSpPr>
+          <p:cNvPr id="5" name="Rectangle: Rounded Corners 4">
+            <a:extLst>
+              <a:ext uri="{FF2B5EF4-FFF2-40B4-BE49-F238E27FC236}">
+                <a16:creationId xmlns:a16="http://schemas.microsoft.com/office/drawing/2014/main" id="{DEE1148B-7A33-A9FB-E7A0-609DB33B65CD}"/>
+              </a:ext>
+            </a:extLst>
+          </p:cNvPr>
+          <p:cNvSpPr/>
+          <p:nvPr/>
+        </p:nvSpPr>
+        <p:spPr>
+          <a:xfrm>
+            <a:off x="5554132" y="232837"/>
+            <a:ext cx="4433567" cy="5731933"/>
+          </a:xfrm>
+          <a:prstGeom prst="roundRect">
+            <a:avLst/>
+          </a:prstGeom>
+        </p:spPr>
+        <p:style>
+          <a:lnRef idx="2">
+            <a:schemeClr val="accent1">
+              <a:shade val="15000"/>
+            </a:schemeClr>
+          </a:lnRef>
+          <a:fillRef idx="1">
+            <a:schemeClr val="accent1"/>
+          </a:fillRef>
+          <a:effectRef idx="0">
+            <a:schemeClr val="accent1"/>
+          </a:effectRef>
+          <a:fontRef idx="minor">
+            <a:schemeClr val="lt1"/>
+          </a:fontRef>
+        </p:style>
+        <p:txBody>
+          <a:bodyPr rtlCol="0" anchor="ctr"/>
+          <a:lstStyle/>
+          <a:p>
+            <a:pPr algn="ctr"/>
+            <a:endParaRPr lang="en-CA"/>
+          </a:p>
+        </p:txBody>
+      </p:sp>
+      <p:sp>
+        <p:nvSpPr>
+          <p:cNvPr id="7" name="Flowchart: Magnetic Disk 6">
+            <a:extLst>
+              <a:ext uri="{FF2B5EF4-FFF2-40B4-BE49-F238E27FC236}">
+                <a16:creationId xmlns:a16="http://schemas.microsoft.com/office/drawing/2014/main" id="{B39E0FFD-7FD9-B7FF-6498-38BBF21E7B37}"/>
+              </a:ext>
+            </a:extLst>
+          </p:cNvPr>
+          <p:cNvSpPr/>
+          <p:nvPr/>
+        </p:nvSpPr>
+        <p:spPr>
+          <a:xfrm>
+            <a:off x="7984066" y="2597434"/>
+            <a:ext cx="1540933" cy="1608666"/>
+          </a:xfrm>
+          <a:prstGeom prst="flowChartMagneticDisk">
+            <a:avLst/>
+          </a:prstGeom>
+        </p:spPr>
+        <p:style>
+          <a:lnRef idx="3">
+            <a:schemeClr val="lt1"/>
+          </a:lnRef>
+          <a:fillRef idx="1">
+            <a:schemeClr val="accent2"/>
+          </a:fillRef>
+          <a:effectRef idx="1">
+            <a:schemeClr val="accent2"/>
+          </a:effectRef>
+          <a:fontRef idx="minor">
+            <a:schemeClr val="lt1"/>
+          </a:fontRef>
+        </p:style>
+        <p:txBody>
+          <a:bodyPr rtlCol="0" anchor="ctr"/>
+          <a:lstStyle/>
+          <a:p>
+            <a:pPr algn="ctr"/>
+            <a:r>
+              <a:rPr lang="en-CA" dirty="0"/>
+              <a:t>Database</a:t>
+            </a:r>
+          </a:p>
+        </p:txBody>
+      </p:sp>
+      <p:sp>
+        <p:nvSpPr>
+          <p:cNvPr id="9" name="Lightning Bolt 8">
+            <a:extLst>
+              <a:ext uri="{FF2B5EF4-FFF2-40B4-BE49-F238E27FC236}">
+                <a16:creationId xmlns:a16="http://schemas.microsoft.com/office/drawing/2014/main" id="{351967B6-AF15-612D-E286-54005919567F}"/>
+              </a:ext>
+            </a:extLst>
+          </p:cNvPr>
+          <p:cNvSpPr/>
+          <p:nvPr/>
+        </p:nvSpPr>
+        <p:spPr>
+          <a:xfrm rot="899964">
+            <a:off x="10414000" y="1634067"/>
+            <a:ext cx="905933" cy="2387600"/>
+          </a:xfrm>
+          <a:prstGeom prst="lightningBolt">
+            <a:avLst/>
+          </a:prstGeom>
+        </p:spPr>
+        <p:style>
+          <a:lnRef idx="2">
+            <a:schemeClr val="accent1"/>
+          </a:lnRef>
+          <a:fillRef idx="1">
+            <a:schemeClr val="lt1"/>
+          </a:fillRef>
+          <a:effectRef idx="0">
+            <a:schemeClr val="accent1"/>
+          </a:effectRef>
+          <a:fontRef idx="minor">
+            <a:schemeClr val="dk1"/>
+          </a:fontRef>
+        </p:style>
+        <p:txBody>
+          <a:bodyPr rtlCol="0" anchor="ctr"/>
+          <a:lstStyle/>
+          <a:p>
+            <a:pPr algn="ctr"/>
+            <a:endParaRPr lang="en-CA" dirty="0"/>
+          </a:p>
+        </p:txBody>
+      </p:sp>
+      <p:sp>
+        <p:nvSpPr>
+          <p:cNvPr id="10" name="TextBox 9">
+            <a:extLst>
+              <a:ext uri="{FF2B5EF4-FFF2-40B4-BE49-F238E27FC236}">
+                <a16:creationId xmlns:a16="http://schemas.microsoft.com/office/drawing/2014/main" id="{8FA6B715-F007-3A50-92CD-3194470747D2}"/>
+              </a:ext>
+            </a:extLst>
+          </p:cNvPr>
+          <p:cNvSpPr txBox="1"/>
+          <p:nvPr/>
+        </p:nvSpPr>
+        <p:spPr>
+          <a:xfrm>
+            <a:off x="10120467" y="4402667"/>
+            <a:ext cx="1612364" cy="369332"/>
+          </a:xfrm>
+          <a:prstGeom prst="rect">
+            <a:avLst/>
+          </a:prstGeom>
+          <a:noFill/>
+        </p:spPr>
+        <p:txBody>
+          <a:bodyPr wrap="none" rtlCol="0">
+            <a:spAutoFit/>
+          </a:bodyPr>
+          <a:lstStyle/>
+          <a:p>
+            <a:r>
+              <a:rPr lang="en-CA" dirty="0"/>
+              <a:t>Hydro-</a:t>
+            </a:r>
+            <a:r>
+              <a:rPr lang="en-CA" dirty="0" err="1"/>
+              <a:t>quebec</a:t>
+            </a:r>
+            <a:endParaRPr lang="en-CA" dirty="0"/>
+          </a:p>
+        </p:txBody>
+      </p:sp>
+      <p:sp>
+        <p:nvSpPr>
+          <p:cNvPr id="11" name="Rectangle: Rounded Corners 10">
+            <a:extLst>
+              <a:ext uri="{FF2B5EF4-FFF2-40B4-BE49-F238E27FC236}">
+                <a16:creationId xmlns:a16="http://schemas.microsoft.com/office/drawing/2014/main" id="{547DE59A-103B-CC3B-1034-BC81626BFD98}"/>
+              </a:ext>
+            </a:extLst>
+          </p:cNvPr>
+          <p:cNvSpPr/>
+          <p:nvPr/>
+        </p:nvSpPr>
+        <p:spPr>
+          <a:xfrm>
+            <a:off x="6342149" y="918791"/>
+            <a:ext cx="2207889" cy="770109"/>
+          </a:xfrm>
+          <a:prstGeom prst="roundRect">
+            <a:avLst/>
+          </a:prstGeom>
+          <a:ln w="57150"/>
+        </p:spPr>
+        <p:style>
+          <a:lnRef idx="2">
+            <a:schemeClr val="accent6"/>
+          </a:lnRef>
+          <a:fillRef idx="1">
+            <a:schemeClr val="lt1"/>
+          </a:fillRef>
+          <a:effectRef idx="0">
+            <a:schemeClr val="accent6"/>
+          </a:effectRef>
+          <a:fontRef idx="minor">
+            <a:schemeClr val="dk1"/>
+          </a:fontRef>
+        </p:style>
+        <p:txBody>
+          <a:bodyPr rtlCol="0" anchor="ctr"/>
+          <a:lstStyle/>
+          <a:p>
+            <a:pPr algn="ctr"/>
+            <a:r>
+              <a:rPr lang="en-CA" dirty="0"/>
+              <a:t>Service de </a:t>
+            </a:r>
+            <a:r>
+              <a:rPr lang="en-CA" dirty="0" err="1"/>
+              <a:t>recup</a:t>
+            </a:r>
+            <a:r>
+              <a:rPr lang="en-CA" dirty="0"/>
+              <a:t> de </a:t>
+            </a:r>
+            <a:r>
+              <a:rPr lang="en-CA" dirty="0" err="1"/>
+              <a:t>donnee</a:t>
+            </a:r>
+            <a:r>
+              <a:rPr lang="en-CA" dirty="0"/>
+              <a:t> (each 3mn)</a:t>
+            </a:r>
+          </a:p>
+        </p:txBody>
+      </p:sp>
+      <p:cxnSp>
+        <p:nvCxnSpPr>
+          <p:cNvPr id="14" name="Connector: Elbow 13">
+            <a:extLst>
+              <a:ext uri="{FF2B5EF4-FFF2-40B4-BE49-F238E27FC236}">
+                <a16:creationId xmlns:a16="http://schemas.microsoft.com/office/drawing/2014/main" id="{8407A5C9-F9C6-8A29-5480-B5E45F39877C}"/>
+              </a:ext>
+            </a:extLst>
+          </p:cNvPr>
+          <p:cNvCxnSpPr>
+            <a:cxnSpLocks/>
+            <a:stCxn id="11" idx="3"/>
+            <a:endCxn id="9" idx="2"/>
+          </p:cNvCxnSpPr>
+          <p:nvPr/>
+        </p:nvCxnSpPr>
+        <p:spPr>
+          <a:xfrm>
+            <a:off x="8550038" y="1303846"/>
+            <a:ext cx="2114174" cy="1344388"/>
+          </a:xfrm>
+          <a:prstGeom prst="bentConnector3">
+            <a:avLst>
+              <a:gd name="adj1" fmla="val 50000"/>
+            </a:avLst>
+          </a:prstGeom>
+          <a:ln>
+            <a:tailEnd type="triangle"/>
+          </a:ln>
+        </p:spPr>
+        <p:style>
+          <a:lnRef idx="3">
+            <a:schemeClr val="accent2"/>
+          </a:lnRef>
+          <a:fillRef idx="0">
+            <a:schemeClr val="accent2"/>
+          </a:fillRef>
+          <a:effectRef idx="2">
+            <a:schemeClr val="accent2"/>
+          </a:effectRef>
+          <a:fontRef idx="minor">
+            <a:schemeClr val="tx1"/>
+          </a:fontRef>
+        </p:style>
+      </p:cxnSp>
+      <p:cxnSp>
+        <p:nvCxnSpPr>
+          <p:cNvPr id="16" name="Connector: Elbow 15">
+            <a:extLst>
+              <a:ext uri="{FF2B5EF4-FFF2-40B4-BE49-F238E27FC236}">
+                <a16:creationId xmlns:a16="http://schemas.microsoft.com/office/drawing/2014/main" id="{21FE7F9D-3C56-CF23-1AB7-46A12B734E36}"/>
+              </a:ext>
+            </a:extLst>
+          </p:cNvPr>
+          <p:cNvCxnSpPr>
+            <a:cxnSpLocks/>
+            <a:stCxn id="11" idx="2"/>
+            <a:endCxn id="7" idx="2"/>
+          </p:cNvCxnSpPr>
+          <p:nvPr/>
+        </p:nvCxnSpPr>
+        <p:spPr>
+          <a:xfrm rot="16200000" flipH="1">
+            <a:off x="6858647" y="2276347"/>
+            <a:ext cx="1712867" cy="537972"/>
+          </a:xfrm>
+          <a:prstGeom prst="bentConnector2">
+            <a:avLst/>
+          </a:prstGeom>
+          <a:ln>
+            <a:tailEnd type="triangle"/>
+          </a:ln>
+        </p:spPr>
+        <p:style>
+          <a:lnRef idx="3">
+            <a:schemeClr val="accent2"/>
+          </a:lnRef>
+          <a:fillRef idx="0">
+            <a:schemeClr val="accent2"/>
+          </a:fillRef>
+          <a:effectRef idx="2">
+            <a:schemeClr val="accent2"/>
+          </a:effectRef>
+          <a:fontRef idx="minor">
+            <a:schemeClr val="tx1"/>
+          </a:fontRef>
+        </p:style>
+      </p:cxnSp>
+      <p:sp>
+        <p:nvSpPr>
+          <p:cNvPr id="18" name="TextBox 17">
+            <a:extLst>
+              <a:ext uri="{FF2B5EF4-FFF2-40B4-BE49-F238E27FC236}">
+                <a16:creationId xmlns:a16="http://schemas.microsoft.com/office/drawing/2014/main" id="{A61FF1D6-6EC1-FCDA-8AA7-7EB769CF6A42}"/>
+              </a:ext>
+            </a:extLst>
+          </p:cNvPr>
+          <p:cNvSpPr txBox="1"/>
+          <p:nvPr/>
+        </p:nvSpPr>
+        <p:spPr>
+          <a:xfrm>
+            <a:off x="9297810" y="1504233"/>
+            <a:ext cx="308098" cy="369332"/>
+          </a:xfrm>
+          <a:prstGeom prst="rect">
+            <a:avLst/>
+          </a:prstGeom>
+          <a:noFill/>
+        </p:spPr>
+        <p:txBody>
+          <a:bodyPr wrap="none" rtlCol="0">
+            <a:spAutoFit/>
+          </a:bodyPr>
+          <a:lstStyle/>
+          <a:p>
+            <a:r>
+              <a:rPr lang="en-CA" dirty="0"/>
+              <a:t>1</a:t>
+            </a:r>
+          </a:p>
+        </p:txBody>
+      </p:sp>
+      <p:sp>
+        <p:nvSpPr>
+          <p:cNvPr id="20" name="TextBox 19">
+            <a:extLst>
+              <a:ext uri="{FF2B5EF4-FFF2-40B4-BE49-F238E27FC236}">
+                <a16:creationId xmlns:a16="http://schemas.microsoft.com/office/drawing/2014/main" id="{AA390D1D-17FF-AB49-9773-E26347BDD89E}"/>
+              </a:ext>
+            </a:extLst>
+          </p:cNvPr>
+          <p:cNvSpPr txBox="1"/>
+          <p:nvPr/>
+        </p:nvSpPr>
+        <p:spPr>
+          <a:xfrm>
+            <a:off x="7475260" y="1958501"/>
+            <a:ext cx="308098" cy="369332"/>
+          </a:xfrm>
+          <a:prstGeom prst="rect">
+            <a:avLst/>
+          </a:prstGeom>
+          <a:noFill/>
+        </p:spPr>
+        <p:txBody>
+          <a:bodyPr wrap="none" rtlCol="0">
+            <a:spAutoFit/>
+          </a:bodyPr>
+          <a:lstStyle/>
+          <a:p>
+            <a:r>
+              <a:rPr lang="en-CA" dirty="0"/>
+              <a:t>2</a:t>
+            </a:r>
+          </a:p>
+        </p:txBody>
+      </p:sp>
+    </p:spTree>
+    <p:extLst>
+      <p:ext uri="{BB962C8B-B14F-4D97-AF65-F5344CB8AC3E}">
+        <p14:creationId xmlns:p14="http://schemas.microsoft.com/office/powerpoint/2010/main" val="1568938159"/>
+      </p:ext>
+    </p:extLst>
+  </p:cSld>
+  <p:clrMapOvr>
+    <a:masterClrMapping/>
+  </p:clrMapOvr>
+</p:sld>
+</file>
+
+<file path=ppt/slides/slide5.xml><?xml version="1.0" encoding="utf-8"?>
+<p:sld xmlns:a="http://schemas.openxmlformats.org/drawingml/2006/main" xmlns:r="http://schemas.openxmlformats.org/officeDocument/2006/relationships" xmlns:p="http://schemas.openxmlformats.org/presentationml/2006/main">
+  <p:cSld>
+    <p:spTree>
+      <p:nvGrpSpPr>
+        <p:cNvPr id="1" name="">
+          <a:extLst>
+            <a:ext uri="{FF2B5EF4-FFF2-40B4-BE49-F238E27FC236}">
+              <a16:creationId xmlns:a16="http://schemas.microsoft.com/office/drawing/2014/main" id="{7E42FFDD-7271-D23B-FC32-13E6DB5EC17B}"/>
+            </a:ext>
+          </a:extLst>
+        </p:cNvPr>
+        <p:cNvGrpSpPr/>
+        <p:nvPr/>
+      </p:nvGrpSpPr>
+      <p:grpSpPr>
+        <a:xfrm>
+          <a:off x="0" y="0"/>
+          <a:ext cx="0" cy="0"/>
+          <a:chOff x="0" y="0"/>
+          <a:chExt cx="0" cy="0"/>
+        </a:xfrm>
+      </p:grpSpPr>
+      <p:sp>
+        <p:nvSpPr>
+          <p:cNvPr id="5" name="Rectangle: Rounded Corners 4">
+            <a:extLst>
+              <a:ext uri="{FF2B5EF4-FFF2-40B4-BE49-F238E27FC236}">
+                <a16:creationId xmlns:a16="http://schemas.microsoft.com/office/drawing/2014/main" id="{1D4CDD68-2128-7F1A-963E-15BE71A78E97}"/>
+              </a:ext>
+            </a:extLst>
+          </p:cNvPr>
+          <p:cNvSpPr/>
+          <p:nvPr/>
+        </p:nvSpPr>
+        <p:spPr>
+          <a:xfrm>
+            <a:off x="578534" y="232837"/>
+            <a:ext cx="9409166" cy="5731933"/>
+          </a:xfrm>
+          <a:prstGeom prst="roundRect">
+            <a:avLst/>
+          </a:prstGeom>
+        </p:spPr>
+        <p:style>
+          <a:lnRef idx="2">
+            <a:schemeClr val="accent1">
+              <a:shade val="15000"/>
+            </a:schemeClr>
+          </a:lnRef>
+          <a:fillRef idx="1">
+            <a:schemeClr val="accent1"/>
+          </a:fillRef>
+          <a:effectRef idx="0">
+            <a:schemeClr val="accent1"/>
+          </a:effectRef>
+          <a:fontRef idx="minor">
+            <a:schemeClr val="lt1"/>
+          </a:fontRef>
+        </p:style>
+        <p:txBody>
+          <a:bodyPr rtlCol="0" anchor="ctr"/>
+          <a:lstStyle/>
+          <a:p>
+            <a:pPr algn="ctr"/>
+            <a:endParaRPr lang="en-CA"/>
+          </a:p>
+        </p:txBody>
+      </p:sp>
+      <p:sp>
+        <p:nvSpPr>
+          <p:cNvPr id="7" name="Flowchart: Magnetic Disk 6">
+            <a:extLst>
+              <a:ext uri="{FF2B5EF4-FFF2-40B4-BE49-F238E27FC236}">
+                <a16:creationId xmlns:a16="http://schemas.microsoft.com/office/drawing/2014/main" id="{26162CEA-0B79-4656-BBFD-383C111131DF}"/>
+              </a:ext>
+            </a:extLst>
+          </p:cNvPr>
+          <p:cNvSpPr/>
+          <p:nvPr/>
+        </p:nvSpPr>
+        <p:spPr>
+          <a:xfrm>
+            <a:off x="7984066" y="2597434"/>
+            <a:ext cx="1540933" cy="1608666"/>
+          </a:xfrm>
+          <a:prstGeom prst="flowChartMagneticDisk">
+            <a:avLst/>
+          </a:prstGeom>
+        </p:spPr>
+        <p:style>
+          <a:lnRef idx="3">
+            <a:schemeClr val="lt1"/>
+          </a:lnRef>
+          <a:fillRef idx="1">
+            <a:schemeClr val="accent2"/>
+          </a:fillRef>
+          <a:effectRef idx="1">
+            <a:schemeClr val="accent2"/>
+          </a:effectRef>
+          <a:fontRef idx="minor">
+            <a:schemeClr val="lt1"/>
+          </a:fontRef>
+        </p:style>
+        <p:txBody>
+          <a:bodyPr rtlCol="0" anchor="ctr"/>
+          <a:lstStyle/>
+          <a:p>
+            <a:pPr algn="ctr"/>
+            <a:r>
+              <a:rPr lang="en-CA" dirty="0"/>
+              <a:t>Database</a:t>
+            </a:r>
+          </a:p>
+        </p:txBody>
+      </p:sp>
+      <p:sp>
+        <p:nvSpPr>
+          <p:cNvPr id="9" name="Lightning Bolt 8">
+            <a:extLst>
+              <a:ext uri="{FF2B5EF4-FFF2-40B4-BE49-F238E27FC236}">
+                <a16:creationId xmlns:a16="http://schemas.microsoft.com/office/drawing/2014/main" id="{2DB5D690-A870-C941-4236-D86F05FB0CFC}"/>
+              </a:ext>
+            </a:extLst>
+          </p:cNvPr>
+          <p:cNvSpPr/>
+          <p:nvPr/>
+        </p:nvSpPr>
+        <p:spPr>
+          <a:xfrm rot="899964">
+            <a:off x="10414000" y="1634067"/>
+            <a:ext cx="905933" cy="2387600"/>
+          </a:xfrm>
+          <a:prstGeom prst="lightningBolt">
+            <a:avLst/>
+          </a:prstGeom>
+        </p:spPr>
+        <p:style>
+          <a:lnRef idx="2">
+            <a:schemeClr val="accent1"/>
+          </a:lnRef>
+          <a:fillRef idx="1">
+            <a:schemeClr val="lt1"/>
+          </a:fillRef>
+          <a:effectRef idx="0">
+            <a:schemeClr val="accent1"/>
+          </a:effectRef>
+          <a:fontRef idx="minor">
+            <a:schemeClr val="dk1"/>
+          </a:fontRef>
+        </p:style>
+        <p:txBody>
+          <a:bodyPr rtlCol="0" anchor="ctr"/>
+          <a:lstStyle/>
+          <a:p>
+            <a:pPr algn="ctr"/>
+            <a:endParaRPr lang="en-CA" dirty="0"/>
+          </a:p>
+        </p:txBody>
+      </p:sp>
+      <p:sp>
+        <p:nvSpPr>
+          <p:cNvPr id="10" name="TextBox 9">
+            <a:extLst>
+              <a:ext uri="{FF2B5EF4-FFF2-40B4-BE49-F238E27FC236}">
+                <a16:creationId xmlns:a16="http://schemas.microsoft.com/office/drawing/2014/main" id="{2323AE71-8722-E929-B1FB-AC9218DF9789}"/>
+              </a:ext>
+            </a:extLst>
+          </p:cNvPr>
+          <p:cNvSpPr txBox="1"/>
+          <p:nvPr/>
+        </p:nvSpPr>
+        <p:spPr>
+          <a:xfrm>
+            <a:off x="10120467" y="4402667"/>
+            <a:ext cx="1612364" cy="369332"/>
+          </a:xfrm>
+          <a:prstGeom prst="rect">
+            <a:avLst/>
+          </a:prstGeom>
+          <a:noFill/>
+        </p:spPr>
+        <p:txBody>
+          <a:bodyPr wrap="none" rtlCol="0">
+            <a:spAutoFit/>
+          </a:bodyPr>
+          <a:lstStyle/>
+          <a:p>
+            <a:r>
+              <a:rPr lang="en-CA" dirty="0"/>
+              <a:t>Hydro-</a:t>
+            </a:r>
+            <a:r>
+              <a:rPr lang="en-CA" dirty="0" err="1"/>
+              <a:t>quebec</a:t>
+            </a:r>
+            <a:endParaRPr lang="en-CA" dirty="0"/>
+          </a:p>
+        </p:txBody>
+      </p:sp>
+      <p:sp>
+        <p:nvSpPr>
+          <p:cNvPr id="11" name="Rectangle: Rounded Corners 10">
+            <a:extLst>
+              <a:ext uri="{FF2B5EF4-FFF2-40B4-BE49-F238E27FC236}">
+                <a16:creationId xmlns:a16="http://schemas.microsoft.com/office/drawing/2014/main" id="{7BE62E10-5475-B2E4-2D30-4D837D2DE35E}"/>
+              </a:ext>
+            </a:extLst>
+          </p:cNvPr>
+          <p:cNvSpPr/>
+          <p:nvPr/>
+        </p:nvSpPr>
+        <p:spPr>
+          <a:xfrm>
+            <a:off x="6342149" y="918791"/>
+            <a:ext cx="2207889" cy="770109"/>
+          </a:xfrm>
+          <a:prstGeom prst="roundRect">
+            <a:avLst/>
+          </a:prstGeom>
+          <a:ln w="57150"/>
+        </p:spPr>
+        <p:style>
+          <a:lnRef idx="2">
+            <a:schemeClr val="accent6"/>
+          </a:lnRef>
+          <a:fillRef idx="1">
+            <a:schemeClr val="lt1"/>
+          </a:fillRef>
+          <a:effectRef idx="0">
+            <a:schemeClr val="accent6"/>
+          </a:effectRef>
+          <a:fontRef idx="minor">
+            <a:schemeClr val="dk1"/>
+          </a:fontRef>
+        </p:style>
+        <p:txBody>
+          <a:bodyPr rtlCol="0" anchor="ctr"/>
+          <a:lstStyle/>
+          <a:p>
+            <a:pPr algn="ctr"/>
+            <a:r>
+              <a:rPr lang="en-CA" dirty="0"/>
+              <a:t>Service de </a:t>
+            </a:r>
+            <a:r>
+              <a:rPr lang="en-CA" dirty="0" err="1"/>
+              <a:t>recup</a:t>
+            </a:r>
+            <a:r>
+              <a:rPr lang="en-CA" dirty="0"/>
+              <a:t> de </a:t>
+            </a:r>
+            <a:r>
+              <a:rPr lang="en-CA" dirty="0" err="1"/>
+              <a:t>donnee</a:t>
+            </a:r>
+            <a:r>
+              <a:rPr lang="en-CA" dirty="0"/>
+              <a:t> (each 3mn)</a:t>
+            </a:r>
+          </a:p>
+        </p:txBody>
+      </p:sp>
+      <p:cxnSp>
+        <p:nvCxnSpPr>
+          <p:cNvPr id="14" name="Connector: Elbow 13">
+            <a:extLst>
+              <a:ext uri="{FF2B5EF4-FFF2-40B4-BE49-F238E27FC236}">
+                <a16:creationId xmlns:a16="http://schemas.microsoft.com/office/drawing/2014/main" id="{A189ABA4-34ED-2146-B9B6-22932973C050}"/>
+              </a:ext>
+            </a:extLst>
+          </p:cNvPr>
+          <p:cNvCxnSpPr>
+            <a:cxnSpLocks/>
+            <a:stCxn id="11" idx="3"/>
+            <a:endCxn id="9" idx="2"/>
+          </p:cNvCxnSpPr>
+          <p:nvPr/>
+        </p:nvCxnSpPr>
+        <p:spPr>
+          <a:xfrm>
+            <a:off x="8550038" y="1303846"/>
+            <a:ext cx="2114174" cy="1344388"/>
+          </a:xfrm>
+          <a:prstGeom prst="bentConnector3">
+            <a:avLst>
+              <a:gd name="adj1" fmla="val 50000"/>
+            </a:avLst>
+          </a:prstGeom>
+          <a:ln>
+            <a:tailEnd type="triangle"/>
+          </a:ln>
+        </p:spPr>
+        <p:style>
+          <a:lnRef idx="3">
+            <a:schemeClr val="accent2"/>
+          </a:lnRef>
+          <a:fillRef idx="0">
+            <a:schemeClr val="accent2"/>
+          </a:fillRef>
+          <a:effectRef idx="2">
+            <a:schemeClr val="accent2"/>
+          </a:effectRef>
+          <a:fontRef idx="minor">
+            <a:schemeClr val="tx1"/>
+          </a:fontRef>
+        </p:style>
+      </p:cxnSp>
+      <p:cxnSp>
+        <p:nvCxnSpPr>
+          <p:cNvPr id="16" name="Connector: Elbow 15">
+            <a:extLst>
+              <a:ext uri="{FF2B5EF4-FFF2-40B4-BE49-F238E27FC236}">
+                <a16:creationId xmlns:a16="http://schemas.microsoft.com/office/drawing/2014/main" id="{18BE7448-4D9E-F06D-A104-0E16AEF80B6C}"/>
+              </a:ext>
+            </a:extLst>
+          </p:cNvPr>
+          <p:cNvCxnSpPr>
+            <a:cxnSpLocks/>
+            <a:stCxn id="11" idx="2"/>
+            <a:endCxn id="7" idx="2"/>
+          </p:cNvCxnSpPr>
+          <p:nvPr/>
+        </p:nvCxnSpPr>
+        <p:spPr>
+          <a:xfrm rot="16200000" flipH="1">
+            <a:off x="6858647" y="2276347"/>
+            <a:ext cx="1712867" cy="537972"/>
+          </a:xfrm>
+          <a:prstGeom prst="bentConnector2">
+            <a:avLst/>
+          </a:prstGeom>
+          <a:ln>
+            <a:tailEnd type="triangle"/>
+          </a:ln>
+        </p:spPr>
+        <p:style>
+          <a:lnRef idx="3">
+            <a:schemeClr val="accent2"/>
+          </a:lnRef>
+          <a:fillRef idx="0">
+            <a:schemeClr val="accent2"/>
+          </a:fillRef>
+          <a:effectRef idx="2">
+            <a:schemeClr val="accent2"/>
+          </a:effectRef>
+          <a:fontRef idx="minor">
+            <a:schemeClr val="tx1"/>
+          </a:fontRef>
+        </p:style>
+      </p:cxnSp>
+      <p:sp>
+        <p:nvSpPr>
+          <p:cNvPr id="18" name="TextBox 17">
+            <a:extLst>
+              <a:ext uri="{FF2B5EF4-FFF2-40B4-BE49-F238E27FC236}">
+                <a16:creationId xmlns:a16="http://schemas.microsoft.com/office/drawing/2014/main" id="{9DB3D438-E903-4213-7640-F0CACA4B3F92}"/>
+              </a:ext>
+            </a:extLst>
+          </p:cNvPr>
+          <p:cNvSpPr txBox="1"/>
+          <p:nvPr/>
+        </p:nvSpPr>
+        <p:spPr>
+          <a:xfrm>
+            <a:off x="9297810" y="1504233"/>
+            <a:ext cx="308098" cy="369332"/>
+          </a:xfrm>
+          <a:prstGeom prst="rect">
+            <a:avLst/>
+          </a:prstGeom>
+          <a:noFill/>
+        </p:spPr>
+        <p:txBody>
+          <a:bodyPr wrap="none" rtlCol="0">
+            <a:spAutoFit/>
+          </a:bodyPr>
+          <a:lstStyle/>
+          <a:p>
+            <a:r>
+              <a:rPr lang="en-CA" dirty="0"/>
+              <a:t>1</a:t>
+            </a:r>
+          </a:p>
+        </p:txBody>
+      </p:sp>
+      <p:sp>
+        <p:nvSpPr>
+          <p:cNvPr id="20" name="TextBox 19">
+            <a:extLst>
+              <a:ext uri="{FF2B5EF4-FFF2-40B4-BE49-F238E27FC236}">
+                <a16:creationId xmlns:a16="http://schemas.microsoft.com/office/drawing/2014/main" id="{9945B880-6CA7-E98B-5919-0AFEB69F8135}"/>
+              </a:ext>
+            </a:extLst>
+          </p:cNvPr>
+          <p:cNvSpPr txBox="1"/>
+          <p:nvPr/>
+        </p:nvSpPr>
+        <p:spPr>
+          <a:xfrm>
+            <a:off x="7475260" y="1958501"/>
+            <a:ext cx="308098" cy="369332"/>
+          </a:xfrm>
+          <a:prstGeom prst="rect">
+            <a:avLst/>
+          </a:prstGeom>
+          <a:noFill/>
+        </p:spPr>
+        <p:txBody>
+          <a:bodyPr wrap="none" rtlCol="0">
+            <a:spAutoFit/>
+          </a:bodyPr>
+          <a:lstStyle/>
+          <a:p>
+            <a:r>
+              <a:rPr lang="en-CA" dirty="0"/>
+              <a:t>2</a:t>
+            </a:r>
+          </a:p>
+        </p:txBody>
+      </p:sp>
+      <p:sp>
+        <p:nvSpPr>
+          <p:cNvPr id="22" name="Rectangle: Rounded Corners 21">
+            <a:extLst>
+              <a:ext uri="{FF2B5EF4-FFF2-40B4-BE49-F238E27FC236}">
+                <a16:creationId xmlns:a16="http://schemas.microsoft.com/office/drawing/2014/main" id="{9C540D74-F97E-8B28-F6CC-564C9DD56735}"/>
+              </a:ext>
+            </a:extLst>
+          </p:cNvPr>
+          <p:cNvSpPr/>
+          <p:nvPr/>
+        </p:nvSpPr>
+        <p:spPr>
+          <a:xfrm>
+            <a:off x="3487699" y="4510786"/>
+            <a:ext cx="2472267" cy="770109"/>
+          </a:xfrm>
+          <a:prstGeom prst="roundRect">
+            <a:avLst/>
+          </a:prstGeom>
+          <a:ln w="57150"/>
+        </p:spPr>
+        <p:style>
+          <a:lnRef idx="2">
+            <a:schemeClr val="accent6"/>
+          </a:lnRef>
+          <a:fillRef idx="1">
+            <a:schemeClr val="lt1"/>
+          </a:fillRef>
+          <a:effectRef idx="0">
+            <a:schemeClr val="accent6"/>
+          </a:effectRef>
+          <a:fontRef idx="minor">
+            <a:schemeClr val="dk1"/>
+          </a:fontRef>
+        </p:style>
+        <p:txBody>
+          <a:bodyPr rtlCol="0" anchor="ctr"/>
+          <a:lstStyle/>
+          <a:p>
+            <a:pPr algn="ctr"/>
+            <a:r>
+              <a:rPr lang="en-CA" dirty="0"/>
+              <a:t>Training des </a:t>
+            </a:r>
+            <a:r>
+              <a:rPr lang="en-CA" dirty="0" err="1"/>
+              <a:t>modeles</a:t>
+            </a:r>
+            <a:br>
+              <a:rPr lang="en-CA" dirty="0"/>
+            </a:br>
+            <a:r>
+              <a:rPr lang="en-CA" dirty="0"/>
+              <a:t>H2O </a:t>
+            </a:r>
+            <a:r>
+              <a:rPr lang="en-CA" dirty="0" err="1"/>
+              <a:t>Automl</a:t>
+            </a:r>
+            <a:endParaRPr lang="en-CA" dirty="0"/>
+          </a:p>
+        </p:txBody>
+      </p:sp>
+      <p:cxnSp>
+        <p:nvCxnSpPr>
+          <p:cNvPr id="23" name="Connector: Elbow 22">
+            <a:extLst>
+              <a:ext uri="{FF2B5EF4-FFF2-40B4-BE49-F238E27FC236}">
+                <a16:creationId xmlns:a16="http://schemas.microsoft.com/office/drawing/2014/main" id="{85FE711F-AE82-AA61-65D5-428497F115CE}"/>
+              </a:ext>
+            </a:extLst>
+          </p:cNvPr>
+          <p:cNvCxnSpPr>
+            <a:cxnSpLocks/>
+            <a:stCxn id="22" idx="3"/>
+            <a:endCxn id="7" idx="2"/>
+          </p:cNvCxnSpPr>
+          <p:nvPr/>
+        </p:nvCxnSpPr>
+        <p:spPr>
+          <a:xfrm flipV="1">
+            <a:off x="5959966" y="3401767"/>
+            <a:ext cx="2024100" cy="1494074"/>
+          </a:xfrm>
+          <a:prstGeom prst="bentConnector3">
+            <a:avLst>
+              <a:gd name="adj1" fmla="val 50000"/>
+            </a:avLst>
+          </a:prstGeom>
+          <a:ln>
+            <a:tailEnd type="triangle"/>
+          </a:ln>
+        </p:spPr>
+        <p:style>
+          <a:lnRef idx="3">
+            <a:schemeClr val="accent2"/>
+          </a:lnRef>
+          <a:fillRef idx="0">
+            <a:schemeClr val="accent2"/>
+          </a:fillRef>
+          <a:effectRef idx="2">
+            <a:schemeClr val="accent2"/>
+          </a:effectRef>
+          <a:fontRef idx="minor">
+            <a:schemeClr val="tx1"/>
+          </a:fontRef>
+        </p:style>
+      </p:cxnSp>
+      <p:sp>
+        <p:nvSpPr>
+          <p:cNvPr id="28" name="TextBox 27">
+            <a:extLst>
+              <a:ext uri="{FF2B5EF4-FFF2-40B4-BE49-F238E27FC236}">
+                <a16:creationId xmlns:a16="http://schemas.microsoft.com/office/drawing/2014/main" id="{79F01E8A-2EC0-A336-D52F-28A37629D03D}"/>
+              </a:ext>
+            </a:extLst>
+          </p:cNvPr>
+          <p:cNvSpPr txBox="1"/>
+          <p:nvPr/>
+        </p:nvSpPr>
+        <p:spPr>
+          <a:xfrm>
+            <a:off x="6082126" y="2334778"/>
+            <a:ext cx="308098" cy="369332"/>
+          </a:xfrm>
+          <a:prstGeom prst="rect">
+            <a:avLst/>
+          </a:prstGeom>
+          <a:noFill/>
+        </p:spPr>
+        <p:txBody>
+          <a:bodyPr wrap="none" rtlCol="0">
+            <a:spAutoFit/>
+          </a:bodyPr>
+          <a:lstStyle/>
+          <a:p>
+            <a:r>
+              <a:rPr lang="en-CA" dirty="0"/>
+              <a:t>3</a:t>
+            </a:r>
+          </a:p>
+        </p:txBody>
+      </p:sp>
+      <p:sp>
+        <p:nvSpPr>
+          <p:cNvPr id="32" name="Rectangle: Rounded Corners 31">
+            <a:extLst>
+              <a:ext uri="{FF2B5EF4-FFF2-40B4-BE49-F238E27FC236}">
+                <a16:creationId xmlns:a16="http://schemas.microsoft.com/office/drawing/2014/main" id="{10638808-7295-0A27-9980-18767934E418}"/>
+              </a:ext>
+            </a:extLst>
+          </p:cNvPr>
+          <p:cNvSpPr/>
+          <p:nvPr/>
+        </p:nvSpPr>
+        <p:spPr>
+          <a:xfrm>
+            <a:off x="1845791" y="2347214"/>
+            <a:ext cx="2472267" cy="770109"/>
+          </a:xfrm>
+          <a:prstGeom prst="roundRect">
+            <a:avLst/>
+          </a:prstGeom>
+          <a:ln w="57150"/>
+        </p:spPr>
+        <p:style>
+          <a:lnRef idx="2">
+            <a:schemeClr val="accent6"/>
+          </a:lnRef>
+          <a:fillRef idx="1">
+            <a:schemeClr val="lt1"/>
+          </a:fillRef>
+          <a:effectRef idx="0">
+            <a:schemeClr val="accent6"/>
+          </a:effectRef>
+          <a:fontRef idx="minor">
+            <a:schemeClr val="dk1"/>
+          </a:fontRef>
+        </p:style>
+        <p:txBody>
+          <a:bodyPr rtlCol="0" anchor="ctr"/>
+          <a:lstStyle/>
+          <a:p>
+            <a:pPr algn="ctr"/>
+            <a:r>
+              <a:rPr lang="en-CA" dirty="0"/>
+              <a:t>Server </a:t>
+            </a:r>
+          </a:p>
+          <a:p>
+            <a:pPr algn="ctr"/>
+            <a:r>
+              <a:rPr lang="en-CA" dirty="0"/>
+              <a:t>ML flow </a:t>
+            </a:r>
+          </a:p>
+        </p:txBody>
+      </p:sp>
+      <p:cxnSp>
+        <p:nvCxnSpPr>
+          <p:cNvPr id="33" name="Connector: Elbow 32">
+            <a:extLst>
+              <a:ext uri="{FF2B5EF4-FFF2-40B4-BE49-F238E27FC236}">
+                <a16:creationId xmlns:a16="http://schemas.microsoft.com/office/drawing/2014/main" id="{E27A164D-6D36-CD83-8E48-F7C28DB08732}"/>
+              </a:ext>
+            </a:extLst>
+          </p:cNvPr>
+          <p:cNvCxnSpPr>
+            <a:cxnSpLocks/>
+            <a:stCxn id="32" idx="3"/>
+            <a:endCxn id="7" idx="2"/>
+          </p:cNvCxnSpPr>
+          <p:nvPr/>
+        </p:nvCxnSpPr>
+        <p:spPr>
+          <a:xfrm>
+            <a:off x="4318058" y="2732269"/>
+            <a:ext cx="3666008" cy="669498"/>
+          </a:xfrm>
+          <a:prstGeom prst="bentConnector3">
+            <a:avLst>
+              <a:gd name="adj1" fmla="val 50000"/>
+            </a:avLst>
+          </a:prstGeom>
+          <a:ln>
+            <a:tailEnd type="triangle"/>
+          </a:ln>
+        </p:spPr>
+        <p:style>
+          <a:lnRef idx="3">
+            <a:schemeClr val="accent2"/>
+          </a:lnRef>
+          <a:fillRef idx="0">
+            <a:schemeClr val="accent2"/>
+          </a:fillRef>
+          <a:effectRef idx="2">
+            <a:schemeClr val="accent2"/>
+          </a:effectRef>
+          <a:fontRef idx="minor">
+            <a:schemeClr val="tx1"/>
+          </a:fontRef>
+        </p:style>
+      </p:cxnSp>
+      <p:sp>
+        <p:nvSpPr>
+          <p:cNvPr id="37" name="TextBox 36">
+            <a:extLst>
+              <a:ext uri="{FF2B5EF4-FFF2-40B4-BE49-F238E27FC236}">
+                <a16:creationId xmlns:a16="http://schemas.microsoft.com/office/drawing/2014/main" id="{26372906-E3A7-32CD-16D8-BCA296CA7CA2}"/>
+              </a:ext>
+            </a:extLst>
+          </p:cNvPr>
+          <p:cNvSpPr txBox="1"/>
+          <p:nvPr/>
+        </p:nvSpPr>
+        <p:spPr>
+          <a:xfrm>
+            <a:off x="7292044" y="4534370"/>
+            <a:ext cx="308098" cy="369332"/>
+          </a:xfrm>
+          <a:prstGeom prst="rect">
+            <a:avLst/>
+          </a:prstGeom>
+          <a:noFill/>
+        </p:spPr>
+        <p:txBody>
+          <a:bodyPr wrap="none" rtlCol="0">
+            <a:spAutoFit/>
+          </a:bodyPr>
+          <a:lstStyle/>
+          <a:p>
+            <a:r>
+              <a:rPr lang="en-CA" dirty="0"/>
+              <a:t>4</a:t>
+            </a:r>
+          </a:p>
+        </p:txBody>
+      </p:sp>
+    </p:spTree>
+    <p:extLst>
+      <p:ext uri="{BB962C8B-B14F-4D97-AF65-F5344CB8AC3E}">
+        <p14:creationId xmlns:p14="http://schemas.microsoft.com/office/powerpoint/2010/main" val="3145287010"/>
+      </p:ext>
+    </p:extLst>
+  </p:cSld>
+  <p:clrMapOvr>
+    <a:masterClrMapping/>
+  </p:clrMapOvr>
+</p:sld>
+</file>
+
+<file path=ppt/slides/slide6.xml><?xml version="1.0" encoding="utf-8"?>
+<p:sld xmlns:a="http://schemas.openxmlformats.org/drawingml/2006/main" xmlns:r="http://schemas.openxmlformats.org/officeDocument/2006/relationships" xmlns:p="http://schemas.openxmlformats.org/presentationml/2006/main">
+  <p:cSld>
+    <p:spTree>
+      <p:nvGrpSpPr>
+        <p:cNvPr id="1" name="">
+          <a:extLst>
+            <a:ext uri="{FF2B5EF4-FFF2-40B4-BE49-F238E27FC236}">
+              <a16:creationId xmlns:a16="http://schemas.microsoft.com/office/drawing/2014/main" id="{058AF4F1-5B67-0AF6-94AC-8BABD80266CD}"/>
+            </a:ext>
+          </a:extLst>
+        </p:cNvPr>
+        <p:cNvGrpSpPr/>
+        <p:nvPr/>
+      </p:nvGrpSpPr>
+      <p:grpSpPr>
+        <a:xfrm>
+          <a:off x="0" y="0"/>
+          <a:ext cx="0" cy="0"/>
+          <a:chOff x="0" y="0"/>
+          <a:chExt cx="0" cy="0"/>
+        </a:xfrm>
+      </p:grpSpPr>
+      <p:sp>
+        <p:nvSpPr>
+          <p:cNvPr id="5" name="Rectangle: Rounded Corners 4">
+            <a:extLst>
+              <a:ext uri="{FF2B5EF4-FFF2-40B4-BE49-F238E27FC236}">
+                <a16:creationId xmlns:a16="http://schemas.microsoft.com/office/drawing/2014/main" id="{05EAB346-8708-B3DE-F7FB-0AB7D37E4E1D}"/>
+              </a:ext>
+            </a:extLst>
+          </p:cNvPr>
+          <p:cNvSpPr/>
+          <p:nvPr/>
+        </p:nvSpPr>
+        <p:spPr>
+          <a:xfrm>
+            <a:off x="578534" y="232837"/>
+            <a:ext cx="9409166" cy="5731933"/>
+          </a:xfrm>
+          <a:prstGeom prst="roundRect">
+            <a:avLst/>
+          </a:prstGeom>
+        </p:spPr>
+        <p:style>
+          <a:lnRef idx="2">
+            <a:schemeClr val="accent1">
+              <a:shade val="15000"/>
+            </a:schemeClr>
+          </a:lnRef>
+          <a:fillRef idx="1">
+            <a:schemeClr val="accent1"/>
+          </a:fillRef>
+          <a:effectRef idx="0">
+            <a:schemeClr val="accent1"/>
+          </a:effectRef>
+          <a:fontRef idx="minor">
+            <a:schemeClr val="lt1"/>
+          </a:fontRef>
+        </p:style>
+        <p:txBody>
+          <a:bodyPr rtlCol="0" anchor="ctr"/>
+          <a:lstStyle/>
+          <a:p>
+            <a:pPr algn="ctr"/>
+            <a:endParaRPr lang="en-CA"/>
+          </a:p>
+        </p:txBody>
+      </p:sp>
+      <p:sp>
+        <p:nvSpPr>
+          <p:cNvPr id="7" name="Flowchart: Magnetic Disk 6">
+            <a:extLst>
+              <a:ext uri="{FF2B5EF4-FFF2-40B4-BE49-F238E27FC236}">
+                <a16:creationId xmlns:a16="http://schemas.microsoft.com/office/drawing/2014/main" id="{14B4A3D2-C8FB-9924-D8D4-72E7771B27D3}"/>
+              </a:ext>
+            </a:extLst>
+          </p:cNvPr>
+          <p:cNvSpPr/>
+          <p:nvPr/>
+        </p:nvSpPr>
+        <p:spPr>
+          <a:xfrm>
+            <a:off x="7984066" y="2597434"/>
+            <a:ext cx="1540933" cy="1608666"/>
+          </a:xfrm>
+          <a:prstGeom prst="flowChartMagneticDisk">
+            <a:avLst/>
+          </a:prstGeom>
+        </p:spPr>
+        <p:style>
+          <a:lnRef idx="3">
+            <a:schemeClr val="lt1"/>
+          </a:lnRef>
+          <a:fillRef idx="1">
+            <a:schemeClr val="accent2"/>
+          </a:fillRef>
+          <a:effectRef idx="1">
+            <a:schemeClr val="accent2"/>
+          </a:effectRef>
+          <a:fontRef idx="minor">
+            <a:schemeClr val="lt1"/>
+          </a:fontRef>
+        </p:style>
+        <p:txBody>
+          <a:bodyPr rtlCol="0" anchor="ctr"/>
+          <a:lstStyle/>
+          <a:p>
+            <a:pPr algn="ctr"/>
+            <a:r>
+              <a:rPr lang="en-CA" dirty="0"/>
+              <a:t>Database</a:t>
+            </a:r>
+          </a:p>
+        </p:txBody>
+      </p:sp>
+      <p:sp>
+        <p:nvSpPr>
+          <p:cNvPr id="9" name="Lightning Bolt 8">
+            <a:extLst>
+              <a:ext uri="{FF2B5EF4-FFF2-40B4-BE49-F238E27FC236}">
+                <a16:creationId xmlns:a16="http://schemas.microsoft.com/office/drawing/2014/main" id="{433369D1-460F-3ADB-6ADB-4E675C4385D0}"/>
+              </a:ext>
+            </a:extLst>
+          </p:cNvPr>
+          <p:cNvSpPr/>
+          <p:nvPr/>
+        </p:nvSpPr>
+        <p:spPr>
+          <a:xfrm rot="899964">
+            <a:off x="10414000" y="1634067"/>
+            <a:ext cx="905933" cy="2387600"/>
+          </a:xfrm>
+          <a:prstGeom prst="lightningBolt">
+            <a:avLst/>
+          </a:prstGeom>
+        </p:spPr>
+        <p:style>
+          <a:lnRef idx="2">
+            <a:schemeClr val="accent1"/>
+          </a:lnRef>
+          <a:fillRef idx="1">
+            <a:schemeClr val="lt1"/>
+          </a:fillRef>
+          <a:effectRef idx="0">
+            <a:schemeClr val="accent1"/>
+          </a:effectRef>
+          <a:fontRef idx="minor">
+            <a:schemeClr val="dk1"/>
+          </a:fontRef>
+        </p:style>
+        <p:txBody>
+          <a:bodyPr rtlCol="0" anchor="ctr"/>
+          <a:lstStyle/>
+          <a:p>
+            <a:pPr algn="ctr"/>
+            <a:endParaRPr lang="en-CA" dirty="0"/>
+          </a:p>
+        </p:txBody>
+      </p:sp>
+      <p:sp>
+        <p:nvSpPr>
+          <p:cNvPr id="10" name="TextBox 9">
+            <a:extLst>
+              <a:ext uri="{FF2B5EF4-FFF2-40B4-BE49-F238E27FC236}">
+                <a16:creationId xmlns:a16="http://schemas.microsoft.com/office/drawing/2014/main" id="{91AD7983-3405-6714-A227-8F9BE362C6ED}"/>
+              </a:ext>
+            </a:extLst>
+          </p:cNvPr>
+          <p:cNvSpPr txBox="1"/>
+          <p:nvPr/>
+        </p:nvSpPr>
+        <p:spPr>
+          <a:xfrm>
+            <a:off x="10120467" y="4402667"/>
+            <a:ext cx="1612364" cy="369332"/>
+          </a:xfrm>
+          <a:prstGeom prst="rect">
+            <a:avLst/>
+          </a:prstGeom>
+          <a:noFill/>
+        </p:spPr>
+        <p:txBody>
+          <a:bodyPr wrap="none" rtlCol="0">
+            <a:spAutoFit/>
+          </a:bodyPr>
+          <a:lstStyle/>
+          <a:p>
+            <a:r>
+              <a:rPr lang="en-CA" dirty="0"/>
+              <a:t>Hydro-</a:t>
+            </a:r>
+            <a:r>
+              <a:rPr lang="en-CA" dirty="0" err="1"/>
+              <a:t>quebec</a:t>
+            </a:r>
+            <a:endParaRPr lang="en-CA" dirty="0"/>
+          </a:p>
+        </p:txBody>
+      </p:sp>
+      <p:sp>
+        <p:nvSpPr>
+          <p:cNvPr id="11" name="Rectangle: Rounded Corners 10">
+            <a:extLst>
+              <a:ext uri="{FF2B5EF4-FFF2-40B4-BE49-F238E27FC236}">
+                <a16:creationId xmlns:a16="http://schemas.microsoft.com/office/drawing/2014/main" id="{1E2509E9-DEF7-FD4A-B70D-F17AEDED66B3}"/>
+              </a:ext>
+            </a:extLst>
+          </p:cNvPr>
+          <p:cNvSpPr/>
+          <p:nvPr/>
+        </p:nvSpPr>
+        <p:spPr>
+          <a:xfrm>
+            <a:off x="6342149" y="918791"/>
+            <a:ext cx="2207889" cy="770109"/>
+          </a:xfrm>
+          <a:prstGeom prst="roundRect">
+            <a:avLst/>
+          </a:prstGeom>
+          <a:ln w="57150"/>
+        </p:spPr>
+        <p:style>
+          <a:lnRef idx="2">
+            <a:schemeClr val="accent6"/>
+          </a:lnRef>
+          <a:fillRef idx="1">
+            <a:schemeClr val="lt1"/>
+          </a:fillRef>
+          <a:effectRef idx="0">
+            <a:schemeClr val="accent6"/>
+          </a:effectRef>
+          <a:fontRef idx="minor">
+            <a:schemeClr val="dk1"/>
+          </a:fontRef>
+        </p:style>
+        <p:txBody>
+          <a:bodyPr rtlCol="0" anchor="ctr"/>
+          <a:lstStyle/>
+          <a:p>
+            <a:pPr algn="ctr"/>
+            <a:r>
+              <a:rPr lang="en-CA" dirty="0"/>
+              <a:t>Service de </a:t>
+            </a:r>
+            <a:r>
+              <a:rPr lang="en-CA" dirty="0" err="1"/>
+              <a:t>recup</a:t>
+            </a:r>
+            <a:r>
+              <a:rPr lang="en-CA" dirty="0"/>
+              <a:t> de </a:t>
+            </a:r>
+            <a:r>
+              <a:rPr lang="en-CA" dirty="0" err="1"/>
+              <a:t>donnee</a:t>
+            </a:r>
+            <a:r>
+              <a:rPr lang="en-CA" dirty="0"/>
+              <a:t> (each 3mn)</a:t>
+            </a:r>
+          </a:p>
+        </p:txBody>
+      </p:sp>
+      <p:cxnSp>
+        <p:nvCxnSpPr>
+          <p:cNvPr id="14" name="Connector: Elbow 13">
+            <a:extLst>
+              <a:ext uri="{FF2B5EF4-FFF2-40B4-BE49-F238E27FC236}">
+                <a16:creationId xmlns:a16="http://schemas.microsoft.com/office/drawing/2014/main" id="{70DD34E8-06FF-D64E-60B2-18883C42E3F6}"/>
+              </a:ext>
+            </a:extLst>
+          </p:cNvPr>
+          <p:cNvCxnSpPr>
+            <a:cxnSpLocks/>
+            <a:stCxn id="11" idx="3"/>
+            <a:endCxn id="9" idx="2"/>
+          </p:cNvCxnSpPr>
+          <p:nvPr/>
+        </p:nvCxnSpPr>
+        <p:spPr>
+          <a:xfrm>
+            <a:off x="8550038" y="1303846"/>
+            <a:ext cx="2114174" cy="1344388"/>
+          </a:xfrm>
+          <a:prstGeom prst="bentConnector3">
+            <a:avLst>
+              <a:gd name="adj1" fmla="val 50000"/>
+            </a:avLst>
+          </a:prstGeom>
+          <a:ln>
+            <a:tailEnd type="triangle"/>
+          </a:ln>
+        </p:spPr>
+        <p:style>
+          <a:lnRef idx="3">
+            <a:schemeClr val="accent2"/>
+          </a:lnRef>
+          <a:fillRef idx="0">
+            <a:schemeClr val="accent2"/>
+          </a:fillRef>
+          <a:effectRef idx="2">
+            <a:schemeClr val="accent2"/>
+          </a:effectRef>
+          <a:fontRef idx="minor">
+            <a:schemeClr val="tx1"/>
+          </a:fontRef>
+        </p:style>
+      </p:cxnSp>
+      <p:cxnSp>
+        <p:nvCxnSpPr>
+          <p:cNvPr id="16" name="Connector: Elbow 15">
+            <a:extLst>
+              <a:ext uri="{FF2B5EF4-FFF2-40B4-BE49-F238E27FC236}">
+                <a16:creationId xmlns:a16="http://schemas.microsoft.com/office/drawing/2014/main" id="{FA512AB7-5710-41C1-B134-E11A07E1F6F8}"/>
+              </a:ext>
+            </a:extLst>
+          </p:cNvPr>
+          <p:cNvCxnSpPr>
+            <a:cxnSpLocks/>
+            <a:stCxn id="11" idx="2"/>
+            <a:endCxn id="7" idx="2"/>
+          </p:cNvCxnSpPr>
+          <p:nvPr/>
+        </p:nvCxnSpPr>
+        <p:spPr>
+          <a:xfrm rot="16200000" flipH="1">
+            <a:off x="6858647" y="2276347"/>
+            <a:ext cx="1712867" cy="537972"/>
+          </a:xfrm>
+          <a:prstGeom prst="bentConnector2">
+            <a:avLst/>
+          </a:prstGeom>
+          <a:ln>
+            <a:tailEnd type="triangle"/>
+          </a:ln>
+        </p:spPr>
+        <p:style>
+          <a:lnRef idx="3">
+            <a:schemeClr val="accent2"/>
+          </a:lnRef>
+          <a:fillRef idx="0">
+            <a:schemeClr val="accent2"/>
+          </a:fillRef>
+          <a:effectRef idx="2">
+            <a:schemeClr val="accent2"/>
+          </a:effectRef>
+          <a:fontRef idx="minor">
+            <a:schemeClr val="tx1"/>
+          </a:fontRef>
+        </p:style>
+      </p:cxnSp>
+      <p:sp>
+        <p:nvSpPr>
+          <p:cNvPr id="18" name="TextBox 17">
+            <a:extLst>
+              <a:ext uri="{FF2B5EF4-FFF2-40B4-BE49-F238E27FC236}">
+                <a16:creationId xmlns:a16="http://schemas.microsoft.com/office/drawing/2014/main" id="{6892C8D6-2D53-87A1-95A3-1FC2538E0505}"/>
+              </a:ext>
+            </a:extLst>
+          </p:cNvPr>
+          <p:cNvSpPr txBox="1"/>
+          <p:nvPr/>
+        </p:nvSpPr>
+        <p:spPr>
+          <a:xfrm>
+            <a:off x="9297810" y="1504233"/>
+            <a:ext cx="308098" cy="369332"/>
+          </a:xfrm>
+          <a:prstGeom prst="rect">
+            <a:avLst/>
+          </a:prstGeom>
+          <a:noFill/>
+        </p:spPr>
+        <p:txBody>
+          <a:bodyPr wrap="none" rtlCol="0">
+            <a:spAutoFit/>
+          </a:bodyPr>
+          <a:lstStyle/>
+          <a:p>
+            <a:r>
+              <a:rPr lang="en-CA" dirty="0"/>
+              <a:t>1</a:t>
+            </a:r>
+          </a:p>
+        </p:txBody>
+      </p:sp>
+      <p:sp>
+        <p:nvSpPr>
+          <p:cNvPr id="20" name="TextBox 19">
+            <a:extLst>
+              <a:ext uri="{FF2B5EF4-FFF2-40B4-BE49-F238E27FC236}">
+                <a16:creationId xmlns:a16="http://schemas.microsoft.com/office/drawing/2014/main" id="{6A816F80-5DC7-9F4C-8AD6-A0F049FE3B20}"/>
+              </a:ext>
+            </a:extLst>
+          </p:cNvPr>
+          <p:cNvSpPr txBox="1"/>
+          <p:nvPr/>
+        </p:nvSpPr>
+        <p:spPr>
+          <a:xfrm>
+            <a:off x="7475260" y="1958501"/>
+            <a:ext cx="308098" cy="369332"/>
+          </a:xfrm>
+          <a:prstGeom prst="rect">
+            <a:avLst/>
+          </a:prstGeom>
+          <a:noFill/>
+        </p:spPr>
+        <p:txBody>
+          <a:bodyPr wrap="none" rtlCol="0">
+            <a:spAutoFit/>
+          </a:bodyPr>
+          <a:lstStyle/>
+          <a:p>
+            <a:r>
+              <a:rPr lang="en-CA" dirty="0"/>
+              <a:t>2</a:t>
+            </a:r>
+          </a:p>
+        </p:txBody>
+      </p:sp>
+      <p:sp>
+        <p:nvSpPr>
+          <p:cNvPr id="22" name="Rectangle: Rounded Corners 21">
+            <a:extLst>
+              <a:ext uri="{FF2B5EF4-FFF2-40B4-BE49-F238E27FC236}">
+                <a16:creationId xmlns:a16="http://schemas.microsoft.com/office/drawing/2014/main" id="{33352C64-072F-8227-6705-BE46D80CF658}"/>
+              </a:ext>
+            </a:extLst>
+          </p:cNvPr>
+          <p:cNvSpPr/>
+          <p:nvPr/>
+        </p:nvSpPr>
+        <p:spPr>
+          <a:xfrm>
+            <a:off x="1069402" y="2758186"/>
+            <a:ext cx="2472267" cy="770109"/>
+          </a:xfrm>
+          <a:prstGeom prst="roundRect">
+            <a:avLst/>
+          </a:prstGeom>
+          <a:ln w="57150"/>
+        </p:spPr>
+        <p:style>
+          <a:lnRef idx="2">
+            <a:schemeClr val="accent6"/>
+          </a:lnRef>
+          <a:fillRef idx="1">
+            <a:schemeClr val="lt1"/>
+          </a:fillRef>
+          <a:effectRef idx="0">
+            <a:schemeClr val="accent6"/>
+          </a:effectRef>
+          <a:fontRef idx="minor">
+            <a:schemeClr val="dk1"/>
+          </a:fontRef>
+        </p:style>
+        <p:txBody>
+          <a:bodyPr rtlCol="0" anchor="ctr"/>
+          <a:lstStyle/>
+          <a:p>
+            <a:pPr algn="ctr"/>
+            <a:r>
+              <a:rPr lang="en-CA" dirty="0"/>
+              <a:t>Training des </a:t>
+            </a:r>
+            <a:r>
+              <a:rPr lang="en-CA" dirty="0" err="1"/>
+              <a:t>modeles</a:t>
+            </a:r>
+            <a:br>
+              <a:rPr lang="en-CA" dirty="0"/>
+            </a:br>
+            <a:r>
+              <a:rPr lang="en-CA" dirty="0"/>
+              <a:t>H2O </a:t>
+            </a:r>
+            <a:r>
+              <a:rPr lang="en-CA" dirty="0" err="1"/>
+              <a:t>Automl</a:t>
+            </a:r>
+            <a:endParaRPr lang="en-CA" dirty="0"/>
+          </a:p>
+        </p:txBody>
+      </p:sp>
+      <p:cxnSp>
+        <p:nvCxnSpPr>
+          <p:cNvPr id="23" name="Connector: Elbow 22">
+            <a:extLst>
+              <a:ext uri="{FF2B5EF4-FFF2-40B4-BE49-F238E27FC236}">
+                <a16:creationId xmlns:a16="http://schemas.microsoft.com/office/drawing/2014/main" id="{3AB5EB34-DC23-89F9-957C-6CDD3AC33C04}"/>
+              </a:ext>
+            </a:extLst>
+          </p:cNvPr>
+          <p:cNvCxnSpPr>
+            <a:cxnSpLocks/>
+            <a:stCxn id="22" idx="3"/>
+            <a:endCxn id="7" idx="2"/>
+          </p:cNvCxnSpPr>
+          <p:nvPr/>
+        </p:nvCxnSpPr>
+        <p:spPr>
+          <a:xfrm>
+            <a:off x="3541669" y="3143241"/>
+            <a:ext cx="4442397" cy="258526"/>
+          </a:xfrm>
+          <a:prstGeom prst="bentConnector3">
+            <a:avLst>
+              <a:gd name="adj1" fmla="val 35612"/>
+            </a:avLst>
+          </a:prstGeom>
+          <a:ln>
+            <a:tailEnd type="triangle"/>
+          </a:ln>
+        </p:spPr>
+        <p:style>
+          <a:lnRef idx="3">
+            <a:schemeClr val="accent2"/>
+          </a:lnRef>
+          <a:fillRef idx="0">
+            <a:schemeClr val="accent2"/>
+          </a:fillRef>
+          <a:effectRef idx="2">
+            <a:schemeClr val="accent2"/>
+          </a:effectRef>
+          <a:fontRef idx="minor">
+            <a:schemeClr val="tx1"/>
+          </a:fontRef>
+        </p:style>
+      </p:cxnSp>
+      <p:sp>
+        <p:nvSpPr>
+          <p:cNvPr id="28" name="TextBox 27">
+            <a:extLst>
+              <a:ext uri="{FF2B5EF4-FFF2-40B4-BE49-F238E27FC236}">
+                <a16:creationId xmlns:a16="http://schemas.microsoft.com/office/drawing/2014/main" id="{9BCF0C18-9A7C-D377-58DD-353033B7D1E2}"/>
+              </a:ext>
+            </a:extLst>
+          </p:cNvPr>
+          <p:cNvSpPr txBox="1"/>
+          <p:nvPr/>
+        </p:nvSpPr>
+        <p:spPr>
+          <a:xfrm>
+            <a:off x="6082126" y="2334778"/>
+            <a:ext cx="308098" cy="369332"/>
+          </a:xfrm>
+          <a:prstGeom prst="rect">
+            <a:avLst/>
+          </a:prstGeom>
+          <a:noFill/>
+        </p:spPr>
+        <p:txBody>
+          <a:bodyPr wrap="none" rtlCol="0">
+            <a:spAutoFit/>
+          </a:bodyPr>
+          <a:lstStyle/>
+          <a:p>
+            <a:r>
+              <a:rPr lang="en-CA" dirty="0"/>
+              <a:t>3</a:t>
+            </a:r>
+          </a:p>
+        </p:txBody>
+      </p:sp>
+      <p:sp>
+        <p:nvSpPr>
+          <p:cNvPr id="32" name="Rectangle: Rounded Corners 31">
+            <a:extLst>
+              <a:ext uri="{FF2B5EF4-FFF2-40B4-BE49-F238E27FC236}">
+                <a16:creationId xmlns:a16="http://schemas.microsoft.com/office/drawing/2014/main" id="{D8347517-70CC-7E1C-AB96-8C53CDD60F43}"/>
+              </a:ext>
+            </a:extLst>
+          </p:cNvPr>
+          <p:cNvSpPr/>
+          <p:nvPr/>
+        </p:nvSpPr>
+        <p:spPr>
+          <a:xfrm>
+            <a:off x="1621375" y="636918"/>
+            <a:ext cx="2472267" cy="770109"/>
+          </a:xfrm>
+          <a:prstGeom prst="roundRect">
+            <a:avLst/>
+          </a:prstGeom>
+          <a:ln w="57150"/>
+        </p:spPr>
+        <p:style>
+          <a:lnRef idx="2">
+            <a:schemeClr val="accent6"/>
+          </a:lnRef>
+          <a:fillRef idx="1">
+            <a:schemeClr val="lt1"/>
+          </a:fillRef>
+          <a:effectRef idx="0">
+            <a:schemeClr val="accent6"/>
+          </a:effectRef>
+          <a:fontRef idx="minor">
+            <a:schemeClr val="dk1"/>
+          </a:fontRef>
+        </p:style>
+        <p:txBody>
+          <a:bodyPr rtlCol="0" anchor="ctr"/>
+          <a:lstStyle/>
+          <a:p>
+            <a:pPr algn="ctr"/>
+            <a:r>
+              <a:rPr lang="en-CA" dirty="0"/>
+              <a:t>Server </a:t>
+            </a:r>
+          </a:p>
+          <a:p>
+            <a:pPr algn="ctr"/>
+            <a:r>
+              <a:rPr lang="en-CA" dirty="0"/>
+              <a:t>ML flow </a:t>
+            </a:r>
+          </a:p>
+        </p:txBody>
+      </p:sp>
+      <p:cxnSp>
+        <p:nvCxnSpPr>
+          <p:cNvPr id="33" name="Connector: Elbow 32">
+            <a:extLst>
+              <a:ext uri="{FF2B5EF4-FFF2-40B4-BE49-F238E27FC236}">
+                <a16:creationId xmlns:a16="http://schemas.microsoft.com/office/drawing/2014/main" id="{ED457826-5EBB-A421-6F53-3505C1CEEC78}"/>
+              </a:ext>
+            </a:extLst>
+          </p:cNvPr>
+          <p:cNvCxnSpPr>
+            <a:cxnSpLocks/>
+            <a:stCxn id="32" idx="3"/>
+            <a:endCxn id="7" idx="2"/>
+          </p:cNvCxnSpPr>
+          <p:nvPr/>
+        </p:nvCxnSpPr>
+        <p:spPr>
+          <a:xfrm>
+            <a:off x="4093642" y="1021973"/>
+            <a:ext cx="3890424" cy="2379794"/>
+          </a:xfrm>
+          <a:prstGeom prst="bentConnector3">
+            <a:avLst>
+              <a:gd name="adj1" fmla="val 50000"/>
+            </a:avLst>
+          </a:prstGeom>
+          <a:ln>
+            <a:tailEnd type="triangle"/>
+          </a:ln>
+        </p:spPr>
+        <p:style>
+          <a:lnRef idx="3">
+            <a:schemeClr val="accent2"/>
+          </a:lnRef>
+          <a:fillRef idx="0">
+            <a:schemeClr val="accent2"/>
+          </a:fillRef>
+          <a:effectRef idx="2">
+            <a:schemeClr val="accent2"/>
+          </a:effectRef>
+          <a:fontRef idx="minor">
+            <a:schemeClr val="tx1"/>
+          </a:fontRef>
+        </p:style>
+      </p:cxnSp>
+      <p:sp>
+        <p:nvSpPr>
+          <p:cNvPr id="37" name="TextBox 36">
+            <a:extLst>
+              <a:ext uri="{FF2B5EF4-FFF2-40B4-BE49-F238E27FC236}">
+                <a16:creationId xmlns:a16="http://schemas.microsoft.com/office/drawing/2014/main" id="{700210B8-2B04-10F4-2EFF-74F9122730B3}"/>
+              </a:ext>
+            </a:extLst>
+          </p:cNvPr>
+          <p:cNvSpPr txBox="1"/>
+          <p:nvPr/>
+        </p:nvSpPr>
+        <p:spPr>
+          <a:xfrm>
+            <a:off x="5417301" y="2545333"/>
+            <a:ext cx="308098" cy="369332"/>
+          </a:xfrm>
+          <a:prstGeom prst="rect">
+            <a:avLst/>
+          </a:prstGeom>
+          <a:noFill/>
+        </p:spPr>
+        <p:txBody>
+          <a:bodyPr wrap="none" rtlCol="0">
+            <a:spAutoFit/>
+          </a:bodyPr>
+          <a:lstStyle/>
+          <a:p>
+            <a:r>
+              <a:rPr lang="en-CA" dirty="0"/>
+              <a:t>4</a:t>
+            </a:r>
+          </a:p>
+        </p:txBody>
+      </p:sp>
+      <p:sp>
+        <p:nvSpPr>
+          <p:cNvPr id="38" name="Rectangle: Rounded Corners 37">
+            <a:extLst>
+              <a:ext uri="{FF2B5EF4-FFF2-40B4-BE49-F238E27FC236}">
+                <a16:creationId xmlns:a16="http://schemas.microsoft.com/office/drawing/2014/main" id="{AA73752C-BD6C-A2AA-39F4-FE1835F1395B}"/>
+              </a:ext>
+            </a:extLst>
+          </p:cNvPr>
+          <p:cNvSpPr/>
+          <p:nvPr/>
+        </p:nvSpPr>
+        <p:spPr>
+          <a:xfrm>
+            <a:off x="853728" y="4917531"/>
+            <a:ext cx="2472267" cy="770109"/>
+          </a:xfrm>
+          <a:prstGeom prst="roundRect">
+            <a:avLst/>
+          </a:prstGeom>
+          <a:ln w="57150"/>
+        </p:spPr>
+        <p:style>
+          <a:lnRef idx="2">
+            <a:schemeClr val="accent6"/>
+          </a:lnRef>
+          <a:fillRef idx="1">
+            <a:schemeClr val="lt1"/>
+          </a:fillRef>
+          <a:effectRef idx="0">
+            <a:schemeClr val="accent6"/>
+          </a:effectRef>
+          <a:fontRef idx="minor">
+            <a:schemeClr val="dk1"/>
+          </a:fontRef>
+        </p:style>
+        <p:txBody>
+          <a:bodyPr rtlCol="0" anchor="ctr"/>
+          <a:lstStyle/>
+          <a:p>
+            <a:pPr algn="ctr"/>
+            <a:r>
+              <a:rPr lang="en-CA" dirty="0" err="1"/>
+              <a:t>streamlit</a:t>
+            </a:r>
+            <a:endParaRPr lang="en-CA" dirty="0"/>
+          </a:p>
+        </p:txBody>
+      </p:sp>
+      <p:cxnSp>
+        <p:nvCxnSpPr>
+          <p:cNvPr id="39" name="Connector: Elbow 38">
+            <a:extLst>
+              <a:ext uri="{FF2B5EF4-FFF2-40B4-BE49-F238E27FC236}">
+                <a16:creationId xmlns:a16="http://schemas.microsoft.com/office/drawing/2014/main" id="{F44E0915-3BD5-9D55-5836-A1FD8930AE9F}"/>
+              </a:ext>
+            </a:extLst>
+          </p:cNvPr>
+          <p:cNvCxnSpPr>
+            <a:cxnSpLocks/>
+            <a:stCxn id="4" idx="3"/>
+            <a:endCxn id="7" idx="2"/>
+          </p:cNvCxnSpPr>
+          <p:nvPr/>
+        </p:nvCxnSpPr>
+        <p:spPr>
+          <a:xfrm flipV="1">
+            <a:off x="6289272" y="3401767"/>
+            <a:ext cx="1694794" cy="916444"/>
+          </a:xfrm>
+          <a:prstGeom prst="bentConnector3">
+            <a:avLst>
+              <a:gd name="adj1" fmla="val 50000"/>
+            </a:avLst>
+          </a:prstGeom>
+          <a:ln>
+            <a:tailEnd type="triangle"/>
+          </a:ln>
+        </p:spPr>
+        <p:style>
+          <a:lnRef idx="3">
+            <a:schemeClr val="accent2"/>
+          </a:lnRef>
+          <a:fillRef idx="0">
+            <a:schemeClr val="accent2"/>
+          </a:fillRef>
+          <a:effectRef idx="2">
+            <a:schemeClr val="accent2"/>
+          </a:effectRef>
+          <a:fontRef idx="minor">
+            <a:schemeClr val="tx1"/>
+          </a:fontRef>
+        </p:style>
+      </p:cxnSp>
+      <p:sp>
+        <p:nvSpPr>
+          <p:cNvPr id="40" name="TextBox 39">
+            <a:extLst>
+              <a:ext uri="{FF2B5EF4-FFF2-40B4-BE49-F238E27FC236}">
+                <a16:creationId xmlns:a16="http://schemas.microsoft.com/office/drawing/2014/main" id="{BB5DABC0-ADA4-A818-26A1-2201CA5FE6A1}"/>
+              </a:ext>
+            </a:extLst>
+          </p:cNvPr>
+          <p:cNvSpPr txBox="1"/>
+          <p:nvPr/>
+        </p:nvSpPr>
+        <p:spPr>
+          <a:xfrm>
+            <a:off x="4498744" y="2709418"/>
+            <a:ext cx="308098" cy="369332"/>
+          </a:xfrm>
+          <a:prstGeom prst="rect">
+            <a:avLst/>
+          </a:prstGeom>
+          <a:noFill/>
+        </p:spPr>
+        <p:txBody>
+          <a:bodyPr wrap="none" rtlCol="0">
+            <a:spAutoFit/>
+          </a:bodyPr>
+          <a:lstStyle/>
+          <a:p>
+            <a:r>
+              <a:rPr lang="en-CA" dirty="0"/>
+              <a:t>5</a:t>
+            </a:r>
+          </a:p>
+        </p:txBody>
+      </p:sp>
+      <p:sp>
+        <p:nvSpPr>
+          <p:cNvPr id="4" name="Rectangle: Rounded Corners 3">
+            <a:extLst>
+              <a:ext uri="{FF2B5EF4-FFF2-40B4-BE49-F238E27FC236}">
+                <a16:creationId xmlns:a16="http://schemas.microsoft.com/office/drawing/2014/main" id="{F0D99409-3CDD-AE90-451F-6EEC7C19892B}"/>
+              </a:ext>
+            </a:extLst>
+          </p:cNvPr>
+          <p:cNvSpPr/>
+          <p:nvPr/>
+        </p:nvSpPr>
+        <p:spPr>
+          <a:xfrm>
+            <a:off x="3817005" y="3933156"/>
+            <a:ext cx="2472267" cy="770109"/>
+          </a:xfrm>
+          <a:prstGeom prst="roundRect">
+            <a:avLst/>
+          </a:prstGeom>
+          <a:ln w="57150"/>
+        </p:spPr>
+        <p:style>
+          <a:lnRef idx="2">
+            <a:schemeClr val="accent6"/>
+          </a:lnRef>
+          <a:fillRef idx="1">
+            <a:schemeClr val="lt1"/>
+          </a:fillRef>
+          <a:effectRef idx="0">
+            <a:schemeClr val="accent6"/>
+          </a:effectRef>
+          <a:fontRef idx="minor">
+            <a:schemeClr val="dk1"/>
+          </a:fontRef>
+        </p:style>
+        <p:txBody>
+          <a:bodyPr rtlCol="0" anchor="ctr"/>
+          <a:lstStyle/>
+          <a:p>
+            <a:pPr algn="ctr"/>
+            <a:r>
+              <a:rPr lang="en-CA" dirty="0" err="1"/>
+              <a:t>Fastapi</a:t>
+            </a:r>
+            <a:endParaRPr lang="en-CA" dirty="0"/>
+          </a:p>
+        </p:txBody>
+      </p:sp>
+      <p:sp>
+        <p:nvSpPr>
+          <p:cNvPr id="8" name="Rectangle: Rounded Corners 7">
+            <a:extLst>
+              <a:ext uri="{FF2B5EF4-FFF2-40B4-BE49-F238E27FC236}">
+                <a16:creationId xmlns:a16="http://schemas.microsoft.com/office/drawing/2014/main" id="{D6B222FF-910F-40CC-4F85-5687E071C625}"/>
+              </a:ext>
+            </a:extLst>
+          </p:cNvPr>
+          <p:cNvSpPr/>
+          <p:nvPr/>
+        </p:nvSpPr>
+        <p:spPr>
+          <a:xfrm>
+            <a:off x="1355841" y="1697552"/>
+            <a:ext cx="2472267" cy="770109"/>
+          </a:xfrm>
+          <a:prstGeom prst="roundRect">
+            <a:avLst/>
+          </a:prstGeom>
+          <a:ln w="57150"/>
+        </p:spPr>
+        <p:style>
+          <a:lnRef idx="2">
+            <a:schemeClr val="accent6"/>
+          </a:lnRef>
+          <a:fillRef idx="1">
+            <a:schemeClr val="lt1"/>
+          </a:fillRef>
+          <a:effectRef idx="0">
+            <a:schemeClr val="accent6"/>
+          </a:effectRef>
+          <a:fontRef idx="minor">
+            <a:schemeClr val="dk1"/>
+          </a:fontRef>
+        </p:style>
+        <p:txBody>
+          <a:bodyPr rtlCol="0" anchor="ctr"/>
+          <a:lstStyle/>
+          <a:p>
+            <a:pPr algn="ctr"/>
+            <a:r>
+              <a:rPr lang="en-CA" dirty="0" err="1"/>
+              <a:t>Dvc</a:t>
+            </a:r>
+            <a:r>
+              <a:rPr lang="en-CA" dirty="0"/>
+              <a:t> server:</a:t>
+            </a:r>
+          </a:p>
+          <a:p>
+            <a:pPr algn="ctr"/>
+            <a:r>
+              <a:rPr lang="en-CA" dirty="0"/>
+              <a:t> min-io</a:t>
+            </a:r>
+          </a:p>
+        </p:txBody>
+      </p:sp>
+      <p:cxnSp>
+        <p:nvCxnSpPr>
+          <p:cNvPr id="21" name="Connector: Elbow 20">
+            <a:extLst>
+              <a:ext uri="{FF2B5EF4-FFF2-40B4-BE49-F238E27FC236}">
+                <a16:creationId xmlns:a16="http://schemas.microsoft.com/office/drawing/2014/main" id="{066C4942-4B37-353E-B2AE-909417CE7083}"/>
+              </a:ext>
+            </a:extLst>
+          </p:cNvPr>
+          <p:cNvCxnSpPr>
+            <a:cxnSpLocks/>
+            <a:stCxn id="8" idx="3"/>
+            <a:endCxn id="7" idx="2"/>
+          </p:cNvCxnSpPr>
+          <p:nvPr/>
+        </p:nvCxnSpPr>
+        <p:spPr>
+          <a:xfrm>
+            <a:off x="3828108" y="2082607"/>
+            <a:ext cx="4155958" cy="1319160"/>
+          </a:xfrm>
+          <a:prstGeom prst="bentConnector3">
+            <a:avLst>
+              <a:gd name="adj1" fmla="val 31416"/>
+            </a:avLst>
+          </a:prstGeom>
+          <a:ln>
+            <a:tailEnd type="triangle"/>
+          </a:ln>
+        </p:spPr>
+        <p:style>
+          <a:lnRef idx="3">
+            <a:schemeClr val="accent2"/>
+          </a:lnRef>
+          <a:fillRef idx="0">
+            <a:schemeClr val="accent2"/>
+          </a:fillRef>
+          <a:effectRef idx="2">
+            <a:schemeClr val="accent2"/>
+          </a:effectRef>
+          <a:fontRef idx="minor">
+            <a:schemeClr val="tx1"/>
+          </a:fontRef>
+        </p:style>
+      </p:cxnSp>
+      <p:sp>
+        <p:nvSpPr>
+          <p:cNvPr id="74" name="TextBox 73">
+            <a:extLst>
+              <a:ext uri="{FF2B5EF4-FFF2-40B4-BE49-F238E27FC236}">
+                <a16:creationId xmlns:a16="http://schemas.microsoft.com/office/drawing/2014/main" id="{FF8F3293-4903-6E20-6F4A-3BE9C8E11E1C}"/>
+              </a:ext>
+            </a:extLst>
+          </p:cNvPr>
+          <p:cNvSpPr txBox="1"/>
+          <p:nvPr/>
+        </p:nvSpPr>
+        <p:spPr>
+          <a:xfrm>
+            <a:off x="4723833" y="4917531"/>
+            <a:ext cx="308098" cy="369332"/>
+          </a:xfrm>
+          <a:prstGeom prst="rect">
+            <a:avLst/>
+          </a:prstGeom>
+          <a:noFill/>
+        </p:spPr>
+        <p:txBody>
+          <a:bodyPr wrap="none" rtlCol="0">
+            <a:spAutoFit/>
+          </a:bodyPr>
+          <a:lstStyle/>
+          <a:p>
+            <a:r>
+              <a:rPr lang="en-CA" dirty="0"/>
+              <a:t>6</a:t>
+            </a:r>
+          </a:p>
+        </p:txBody>
+      </p:sp>
+      <p:cxnSp>
+        <p:nvCxnSpPr>
+          <p:cNvPr id="80" name="Connector: Elbow 79">
+            <a:extLst>
+              <a:ext uri="{FF2B5EF4-FFF2-40B4-BE49-F238E27FC236}">
+                <a16:creationId xmlns:a16="http://schemas.microsoft.com/office/drawing/2014/main" id="{4E4967DC-7126-2500-461B-B87A0A499447}"/>
+              </a:ext>
+            </a:extLst>
+          </p:cNvPr>
+          <p:cNvCxnSpPr>
+            <a:stCxn id="4" idx="2"/>
+            <a:endCxn id="38" idx="3"/>
+          </p:cNvCxnSpPr>
+          <p:nvPr/>
+        </p:nvCxnSpPr>
+        <p:spPr>
+          <a:xfrm rot="5400000">
+            <a:off x="3889907" y="4139353"/>
+            <a:ext cx="599321" cy="1727144"/>
+          </a:xfrm>
+          <a:prstGeom prst="bentConnector2">
+            <a:avLst/>
+          </a:prstGeom>
+          <a:ln w="19050" cap="flat" cmpd="sng" algn="ctr">
+            <a:solidFill>
+              <a:schemeClr val="accent2"/>
+            </a:solidFill>
+            <a:prstDash val="solid"/>
+            <a:round/>
+            <a:headEnd type="none" w="med" len="med"/>
+            <a:tailEnd type="arrow" w="med" len="med"/>
+          </a:ln>
+        </p:spPr>
+        <p:style>
+          <a:lnRef idx="0">
+            <a:scrgbClr r="0" g="0" b="0"/>
+          </a:lnRef>
+          <a:fillRef idx="0">
+            <a:scrgbClr r="0" g="0" b="0"/>
+          </a:fillRef>
+          <a:effectRef idx="0">
+            <a:scrgbClr r="0" g="0" b="0"/>
+          </a:effectRef>
+          <a:fontRef idx="minor">
+            <a:schemeClr val="tx1"/>
+          </a:fontRef>
+        </p:style>
+      </p:cxnSp>
+    </p:spTree>
+    <p:extLst>
+      <p:ext uri="{BB962C8B-B14F-4D97-AF65-F5344CB8AC3E}">
+        <p14:creationId xmlns:p14="http://schemas.microsoft.com/office/powerpoint/2010/main" val="4249113958"/>
       </p:ext>
     </p:extLst>
   </p:cSld>
